--- a/apresentacoes/Benchmark_Cego_Medicos.pptx
+++ b/apresentacoes/Benchmark_Cego_Medicos.pptx
@@ -2678,8 +2678,8 @@
         </p:nvSpPr>
         <p:spPr>
           <a:xfrm>
-            <a:off x="548640" y="4663440"/>
-            <a:ext cx="11091672" cy="731520"/>
+            <a:off x="548640" y="4572000"/>
+            <a:ext cx="11091672" cy="1097280"/>
           </a:xfrm>
           <a:prstGeom prst="rect">
             <a:avLst/>
@@ -2695,7 +2695,7 @@
               <a:buNone/>
             </a:pPr>
             <a:r>
-              <a:rPr lang="en-US" sz="1500" i="1" dirty="0">
+              <a:rPr lang="en-US" sz="1600" i="1" dirty="0">
                 <a:solidFill>
                   <a:srgbClr val="155E56"/>
                 </a:solidFill>
@@ -2705,7 +2705,46 @@
               </a:rPr>
               <a:t>O uso como ferramenta de apoio à decisão clínica é permitido e está alinhado com as discussões do CFM sobre uso responsável de tecnologia.</a:t>
             </a:r>
-            <a:endParaRPr lang="en-US" sz="1500" dirty="0"/>
+            <a:endParaRPr lang="en-US" sz="1600" dirty="0"/>
+          </a:p>
+        </p:txBody>
+      </p:sp>
+      <p:sp>
+        <p:nvSpPr>
+          <p:cNvPr id="15" name="Text 13"/>
+          <p:cNvSpPr/>
+          <p:nvPr/>
+        </p:nvSpPr>
+        <p:spPr>
+          <a:xfrm>
+            <a:off x="548640" y="5669280"/>
+            <a:ext cx="11091672" cy="457200"/>
+          </a:xfrm>
+          <a:prstGeom prst="rect">
+            <a:avLst/>
+          </a:prstGeom>
+          <a:noFill/>
+          <a:ln/>
+        </p:spPr>
+        <p:txBody>
+          <a:bodyPr wrap="square" lIns="0" tIns="0" rIns="0" bIns="0" rtlCol="0" anchor="ctr"/>
+          <a:lstStyle/>
+          <a:p>
+            <a:pPr indent="0" marL="0">
+              <a:buNone/>
+            </a:pPr>
+            <a:r>
+              <a:rPr lang="en-US" sz="1300" dirty="0">
+                <a:solidFill>
+                  <a:srgbClr val="5F6F6C"/>
+                </a:solidFill>
+                <a:latin typeface="Arial" pitchFamily="34" charset="0"/>
+                <a:ea typeface="Arial" pitchFamily="34" charset="-122"/>
+                <a:cs typeface="Arial" pitchFamily="34" charset="-120"/>
+              </a:rPr>
+              <a:t>Uso regulamentado: CFM reconhece o uso de ferramentas de IA como apoio, desde que o médico mantenha a decisão final e a responsabilidade profissional.</a:t>
+            </a:r>
+            <a:endParaRPr lang="en-US" sz="1300" dirty="0"/>
           </a:p>
         </p:txBody>
       </p:sp>
@@ -3449,7 +3488,7 @@
           </p:nvPr>
         </p:nvGraphicFramePr>
         <p:xfrm>
-          <a:off x="548640" y="1554480"/>
+          <a:off x="548640" y="1371600"/>
           <a:ext cx="9144000" cy="914400"/>
         </p:xfrm>
         <a:graphic>
@@ -3970,6 +4009,59 @@
           </a:p>
         </p:txBody>
       </p:sp>
+      <p:sp>
+        <p:nvSpPr>
+          <p:cNvPr id="9" name="Text 6"/>
+          <p:cNvSpPr/>
+          <p:nvPr/>
+        </p:nvSpPr>
+        <p:spPr>
+          <a:xfrm>
+            <a:off x="548640" y="5394960"/>
+            <a:ext cx="11091672" cy="731520"/>
+          </a:xfrm>
+          <a:prstGeom prst="rect">
+            <a:avLst/>
+          </a:prstGeom>
+          <a:noFill/>
+          <a:ln/>
+        </p:spPr>
+        <p:txBody>
+          <a:bodyPr wrap="square" lIns="0" tIns="0" rIns="0" bIns="0" rtlCol="0" anchor="ctr"/>
+          <a:lstStyle/>
+          <a:p>
+            <a:pPr indent="0" marL="0">
+              <a:buNone/>
+            </a:pPr>
+            <a:r>
+              <a:rPr lang="en-US" sz="1500" b="1" dirty="0">
+                <a:solidFill>
+                  <a:srgbClr val="155E56"/>
+                </a:solidFill>
+                <a:latin typeface="Arial" pitchFamily="34" charset="0"/>
+                <a:ea typeface="Arial" pitchFamily="34" charset="-122"/>
+                <a:cs typeface="Arial" pitchFamily="34" charset="-120"/>
+              </a:rPr>
+              <a:t>Tempo estimado: </a:t>
+            </a:r>
+            <a:pPr indent="0" marL="0">
+              <a:buNone/>
+            </a:pPr>
+            <a:r>
+              <a:rPr lang="en-US" sz="1500" dirty="0">
+                <a:solidFill>
+                  <a:srgbClr val="18211F"/>
+                </a:solidFill>
+                <a:latin typeface="Arial" pitchFamily="34" charset="0"/>
+                <a:ea typeface="Arial" pitchFamily="34" charset="-122"/>
+                <a:cs typeface="Arial" pitchFamily="34" charset="-120"/>
+              </a:rPr>
+              <a:t>200 casos × 9 modelos = 1.800 respostas para avaliar. A ~2 minutos por resposta = ~6 horas. Você pode dividir em sessões.</a:t>
+            </a:r>
+            <a:endParaRPr lang="en-US" sz="1500" dirty="0"/>
+          </a:p>
+        </p:txBody>
+      </p:sp>
     </p:spTree>
   </p:cSld>
   <p:clrMapOvr>
@@ -4173,7 +4265,7 @@
           </p:nvPr>
         </p:nvGraphicFramePr>
         <p:xfrm>
-          <a:off x="548640" y="1554480"/>
+          <a:off x="548640" y="1371600"/>
           <a:ext cx="6400800" cy="914400"/>
         </p:xfrm>
         <a:graphic>
@@ -4185,7 +4277,7 @@
                 <a:gridCol w="1828800"/>
                 <a:gridCol w="2286000"/>
               </a:tblGrid>
-              <a:tr h="411480">
+              <a:tr h="502920">
                 <a:tc>
                   <a:txBody>
                     <a:bodyPr/>
@@ -4391,7 +4483,7 @@
                   </a:tcPr>
                 </a:tc>
               </a:tr>
-              <a:tr h="411480">
+              <a:tr h="502920">
                 <a:tc>
                   <a:txBody>
                     <a:bodyPr/>
@@ -4855,8 +4947,8 @@
         </p:nvSpPr>
         <p:spPr>
           <a:xfrm>
-            <a:off x="7772400" y="1645920"/>
-            <a:ext cx="3840480" cy="2286000"/>
+            <a:off x="7772400" y="1371600"/>
+            <a:ext cx="3840480" cy="2743200"/>
           </a:xfrm>
           <a:prstGeom prst="rect">
             <a:avLst/>
@@ -4872,7 +4964,7 @@
               <a:buNone/>
             </a:pPr>
             <a:r>
-              <a:rPr lang="en-US" sz="1400" dirty="0">
+              <a:rPr lang="en-US" sz="1500" dirty="0">
                 <a:solidFill>
                   <a:srgbClr val="18211F"/>
                 </a:solidFill>
@@ -4886,7 +4978,7 @@
               <a:buNone/>
             </a:pPr>
             <a:r>
-              <a:rPr lang="en-US" sz="1400" b="1" dirty="0">
+              <a:rPr lang="en-US" sz="1500" b="1" dirty="0">
                 <a:solidFill>
                   <a:srgbClr val="155E56"/>
                 </a:solidFill>
@@ -4900,7 +4992,7 @@
               <a:buNone/>
             </a:pPr>
             <a:r>
-              <a:rPr lang="en-US" sz="1400" dirty="0">
+              <a:rPr lang="en-US" sz="1500" dirty="0">
                 <a:solidFill>
                   <a:srgbClr val="18211F"/>
                 </a:solidFill>
@@ -4910,7 +5002,7 @@
               </a:rPr>
               <a:t>. Um modelo que diz 'ventilação não invasiva' em vez de 'VNI' perde o ponto. A revisão humana corrige isso.</a:t>
             </a:r>
-            <a:endParaRPr lang="en-US" sz="1400" dirty="0"/>
+            <a:endParaRPr lang="en-US" sz="1500" dirty="0"/>
           </a:p>
         </p:txBody>
       </p:sp>

--- a/apresentacoes/Benchmark_Cego_Medicos.pptx
+++ b/apresentacoes/Benchmark_Cego_Medicos.pptx
@@ -13,9 +13,11 @@
     <p:sldId id="261" r:id="rId7"/>
     <p:sldId id="262" r:id="rId8"/>
     <p:sldId id="263" r:id="rId9"/>
+    <p:sldId id="264" r:id="rId10"/>
+    <p:sldId id="265" r:id="rId11"/>
   </p:sldIdLst>
   <p:notesMasterIdLst>
-    <p:notesMasterId r:id="rId10"/>
+    <p:notesMasterId r:id="rId12"/>
   </p:notesMasterIdLst>
   <p:sldSz cx="12192000" cy="6858000"/>
   <p:notesSz cx="6858000" cy="12192000"/>
@@ -551,6 +553,94 @@
 </p:notes>
 </file>
 
+<file path=ppt/notesSlides/notesSlide10.xml><?xml version="1.0" encoding="utf-8"?>
+<p:notes xmlns:a="http://schemas.openxmlformats.org/drawingml/2006/main" xmlns:r="http://schemas.openxmlformats.org/officeDocument/2006/relationships" xmlns:p="http://schemas.openxmlformats.org/presentationml/2006/main">
+  <p:cSld>
+    <p:spTree>
+      <p:nvGrpSpPr>
+        <p:cNvPr id="1" name=""/>
+        <p:cNvGrpSpPr/>
+        <p:nvPr/>
+      </p:nvGrpSpPr>
+      <p:grpSpPr>
+        <a:xfrm>
+          <a:off x="0" y="0"/>
+          <a:ext cx="0" cy="0"/>
+          <a:chOff x="0" y="0"/>
+          <a:chExt cx="0" cy="0"/>
+        </a:xfrm>
+      </p:grpSpPr>
+      <p:sp>
+        <p:nvSpPr>
+          <p:cNvPr id="2" name="Slide Image Placeholder 1"/>
+          <p:cNvSpPr>
+            <a:spLocks noGrp="1" noRot="1" noChangeAspect="1"/>
+          </p:cNvSpPr>
+          <p:nvPr>
+            <p:ph type="sldImg"/>
+          </p:nvPr>
+        </p:nvSpPr>
+        <p:spPr/>
+      </p:sp>
+      <p:sp>
+        <p:nvSpPr>
+          <p:cNvPr id="3" name="Notes Placeholder 2"/>
+          <p:cNvSpPr>
+            <a:spLocks noGrp="1"/>
+          </p:cNvSpPr>
+          <p:nvPr>
+            <p:ph type="body" idx="1"/>
+          </p:nvPr>
+        </p:nvSpPr>
+        <p:spPr/>
+        <p:txBody>
+          <a:bodyPr/>
+          <a:lstStyle/>
+          <a:p>
+            <a:r>
+              <a:rPr lang="en-US" dirty="0"/>
+              <a:t/>
+            </a:r>
+            <a:endParaRPr lang="en-US" dirty="0"/>
+          </a:p>
+        </p:txBody>
+      </p:sp>
+      <p:sp>
+        <p:nvSpPr>
+          <p:cNvPr id="4" name="Slide Number Placeholder 3"/>
+          <p:cNvSpPr>
+            <a:spLocks noGrp="1"/>
+          </p:cNvSpPr>
+          <p:nvPr>
+            <p:ph type="sldNum" sz="quarter" idx="10"/>
+          </p:nvPr>
+        </p:nvSpPr>
+        <p:spPr/>
+        <p:txBody>
+          <a:bodyPr/>
+          <a:lstStyle/>
+          <a:p>
+            <a:fld id="{F7021451-1387-4CA6-816F-3879F97B5CBC}" type="slidenum">
+              <a:rPr lang="en-US"/>
+              <a:t>10</a:t>
+            </a:fld>
+            <a:endParaRPr lang="en-US"/>
+          </a:p>
+        </p:txBody>
+      </p:sp>
+    </p:spTree>
+    <p:extLst>
+      <p:ext uri="{BB962C8B-B14F-4D97-AF65-F5344CB8AC3E}">
+        <p14:creationId xmlns:p14="http://schemas.microsoft.com/office/powerpoint/2010/main" val="1024086991"/>
+      </p:ext>
+    </p:extLst>
+  </p:cSld>
+  <p:clrMapOvr>
+    <a:masterClrMapping/>
+  </p:clrMapOvr>
+</p:notes>
+</file>
+
 <file path=ppt/notesSlides/notesSlide2.xml><?xml version="1.0" encoding="utf-8"?>
 <p:notes xmlns:a="http://schemas.openxmlformats.org/drawingml/2006/main" xmlns:r="http://schemas.openxmlformats.org/officeDocument/2006/relationships" xmlns:p="http://schemas.openxmlformats.org/presentationml/2006/main">
   <p:cSld>
@@ -1149,6 +1239,94 @@
             <a:fld id="{F7021451-1387-4CA6-816F-3879F97B5CBC}" type="slidenum">
               <a:rPr lang="en-US"/>
               <a:t>8</a:t>
+            </a:fld>
+            <a:endParaRPr lang="en-US"/>
+          </a:p>
+        </p:txBody>
+      </p:sp>
+    </p:spTree>
+    <p:extLst>
+      <p:ext uri="{BB962C8B-B14F-4D97-AF65-F5344CB8AC3E}">
+        <p14:creationId xmlns:p14="http://schemas.microsoft.com/office/powerpoint/2010/main" val="1024086991"/>
+      </p:ext>
+    </p:extLst>
+  </p:cSld>
+  <p:clrMapOvr>
+    <a:masterClrMapping/>
+  </p:clrMapOvr>
+</p:notes>
+</file>
+
+<file path=ppt/notesSlides/notesSlide9.xml><?xml version="1.0" encoding="utf-8"?>
+<p:notes xmlns:a="http://schemas.openxmlformats.org/drawingml/2006/main" xmlns:r="http://schemas.openxmlformats.org/officeDocument/2006/relationships" xmlns:p="http://schemas.openxmlformats.org/presentationml/2006/main">
+  <p:cSld>
+    <p:spTree>
+      <p:nvGrpSpPr>
+        <p:cNvPr id="1" name=""/>
+        <p:cNvGrpSpPr/>
+        <p:nvPr/>
+      </p:nvGrpSpPr>
+      <p:grpSpPr>
+        <a:xfrm>
+          <a:off x="0" y="0"/>
+          <a:ext cx="0" cy="0"/>
+          <a:chOff x="0" y="0"/>
+          <a:chExt cx="0" cy="0"/>
+        </a:xfrm>
+      </p:grpSpPr>
+      <p:sp>
+        <p:nvSpPr>
+          <p:cNvPr id="2" name="Slide Image Placeholder 1"/>
+          <p:cNvSpPr>
+            <a:spLocks noGrp="1" noRot="1" noChangeAspect="1"/>
+          </p:cNvSpPr>
+          <p:nvPr>
+            <p:ph type="sldImg"/>
+          </p:nvPr>
+        </p:nvSpPr>
+        <p:spPr/>
+      </p:sp>
+      <p:sp>
+        <p:nvSpPr>
+          <p:cNvPr id="3" name="Notes Placeholder 2"/>
+          <p:cNvSpPr>
+            <a:spLocks noGrp="1"/>
+          </p:cNvSpPr>
+          <p:nvPr>
+            <p:ph type="body" idx="1"/>
+          </p:nvPr>
+        </p:nvSpPr>
+        <p:spPr/>
+        <p:txBody>
+          <a:bodyPr/>
+          <a:lstStyle/>
+          <a:p>
+            <a:r>
+              <a:rPr lang="en-US" dirty="0"/>
+              <a:t/>
+            </a:r>
+            <a:endParaRPr lang="en-US" dirty="0"/>
+          </a:p>
+        </p:txBody>
+      </p:sp>
+      <p:sp>
+        <p:nvSpPr>
+          <p:cNvPr id="4" name="Slide Number Placeholder 3"/>
+          <p:cNvSpPr>
+            <a:spLocks noGrp="1"/>
+          </p:cNvSpPr>
+          <p:nvPr>
+            <p:ph type="sldNum" sz="quarter" idx="10"/>
+          </p:nvPr>
+        </p:nvSpPr>
+        <p:spPr/>
+        <p:txBody>
+          <a:bodyPr/>
+          <a:lstStyle/>
+          <a:p>
+            <a:fld id="{F7021451-1387-4CA6-816F-3879F97B5CBC}" type="slidenum">
+              <a:rPr lang="en-US"/>
+              <a:t>9</a:t>
             </a:fld>
             <a:endParaRPr lang="en-US"/>
           </a:p>
@@ -1642,7 +1820,7 @@
             <a:r>
               <a:rPr lang="en-US" sz="4000" dirty="0">
                 <a:solidFill>
-                  <a:srgbClr val="D97B1E"/>
+                  <a:srgbClr val="E8B931"/>
                 </a:solidFill>
                 <a:latin typeface="Georgia" pitchFamily="34" charset="0"/>
                 <a:ea typeface="Georgia" pitchFamily="34" charset="-122"/>
@@ -1729,6 +1907,505 @@
               <a:t>200 casos clínicos · 9 modelos · 23 especialidades · revisão cega</a:t>
             </a:r>
             <a:endParaRPr lang="en-US" sz="1400" dirty="0"/>
+          </a:p>
+        </p:txBody>
+      </p:sp>
+    </p:spTree>
+  </p:cSld>
+  <p:clrMapOvr>
+    <a:masterClrMapping/>
+  </p:clrMapOvr>
+</p:sld>
+</file>
+
+<file path=ppt/slides/slide10.xml><?xml version="1.0" encoding="utf-8"?>
+<p:sld xmlns:a="http://schemas.openxmlformats.org/drawingml/2006/main" xmlns:r="http://schemas.openxmlformats.org/officeDocument/2006/relationships" xmlns:p="http://schemas.openxmlformats.org/presentationml/2006/main">
+  <p:cSld name="Slide 10">
+    <p:bg>
+      <p:bgPr>
+        <a:solidFill>
+          <a:srgbClr val="FFFFFF"/>
+        </a:solidFill>
+      </p:bgPr>
+    </p:bg>
+    <p:spTree>
+      <p:nvGrpSpPr>
+        <p:cNvPr id="1" name=""/>
+        <p:cNvGrpSpPr/>
+        <p:nvPr/>
+      </p:nvGrpSpPr>
+      <p:grpSpPr>
+        <a:xfrm>
+          <a:off x="0" y="0"/>
+          <a:ext cx="0" cy="0"/>
+          <a:chOff x="0" y="0"/>
+          <a:chExt cx="0" cy="0"/>
+        </a:xfrm>
+      </p:grpSpPr>
+      <p:sp>
+        <p:nvSpPr>
+          <p:cNvPr id="2" name="Text 0"/>
+          <p:cNvSpPr/>
+          <p:nvPr/>
+        </p:nvSpPr>
+        <p:spPr>
+          <a:xfrm>
+            <a:off x="548640" y="6446520"/>
+            <a:ext cx="5486400" cy="274320"/>
+          </a:xfrm>
+          <a:prstGeom prst="rect">
+            <a:avLst/>
+          </a:prstGeom>
+          <a:noFill/>
+          <a:ln/>
+        </p:spPr>
+        <p:txBody>
+          <a:bodyPr wrap="square" lIns="0" tIns="0" rIns="0" bIns="0" rtlCol="0" anchor="ctr"/>
+          <a:lstStyle/>
+          <a:p>
+            <a:pPr indent="0" marL="0">
+              <a:buNone/>
+            </a:pPr>
+            <a:r>
+              <a:rPr lang="en-US" sz="1000" dirty="0">
+                <a:solidFill>
+                  <a:srgbClr val="5F6F6C"/>
+                </a:solidFill>
+                <a:latin typeface="Arial" pitchFamily="34" charset="0"/>
+                <a:ea typeface="Arial" pitchFamily="34" charset="-122"/>
+                <a:cs typeface="Arial" pitchFamily="34" charset="-120"/>
+              </a:rPr>
+              <a:t>BeansTech · Benchmark Cego · Confidencial</a:t>
+            </a:r>
+            <a:endParaRPr lang="en-US" sz="1000" dirty="0"/>
+          </a:p>
+        </p:txBody>
+      </p:sp>
+      <p:sp>
+        <p:nvSpPr>
+          <p:cNvPr id="3" name="Text 1"/>
+          <p:cNvSpPr/>
+          <p:nvPr/>
+        </p:nvSpPr>
+        <p:spPr>
+          <a:xfrm>
+            <a:off x="11091672" y="6446520"/>
+            <a:ext cx="548640" cy="274320"/>
+          </a:xfrm>
+          <a:prstGeom prst="rect">
+            <a:avLst/>
+          </a:prstGeom>
+          <a:noFill/>
+          <a:ln/>
+        </p:spPr>
+        <p:txBody>
+          <a:bodyPr wrap="square" lIns="0" tIns="0" rIns="0" bIns="0" rtlCol="0" anchor="ctr"/>
+          <a:lstStyle/>
+          <a:p>
+            <a:pPr algn="r" indent="0" marL="0">
+              <a:buNone/>
+            </a:pPr>
+            <a:r>
+              <a:rPr lang="en-US" sz="1000" dirty="0">
+                <a:solidFill>
+                  <a:srgbClr val="5F6F6C"/>
+                </a:solidFill>
+                <a:latin typeface="Arial" pitchFamily="34" charset="0"/>
+                <a:ea typeface="Arial" pitchFamily="34" charset="-122"/>
+                <a:cs typeface="Arial" pitchFamily="34" charset="-120"/>
+              </a:rPr>
+              <a:t>10</a:t>
+            </a:r>
+            <a:endParaRPr lang="en-US" sz="1000" dirty="0"/>
+          </a:p>
+        </p:txBody>
+      </p:sp>
+      <p:sp>
+        <p:nvSpPr>
+          <p:cNvPr id="4" name="Text 2"/>
+          <p:cNvSpPr/>
+          <p:nvPr/>
+        </p:nvSpPr>
+        <p:spPr>
+          <a:xfrm>
+            <a:off x="548640" y="365760"/>
+            <a:ext cx="11091672" cy="731520"/>
+          </a:xfrm>
+          <a:prstGeom prst="rect">
+            <a:avLst/>
+          </a:prstGeom>
+          <a:noFill/>
+          <a:ln/>
+        </p:spPr>
+        <p:txBody>
+          <a:bodyPr wrap="square" lIns="0" tIns="0" rIns="0" bIns="0" rtlCol="0" anchor="ctr"/>
+          <a:lstStyle/>
+          <a:p>
+            <a:pPr indent="0" marL="0">
+              <a:buNone/>
+            </a:pPr>
+            <a:r>
+              <a:rPr lang="en-US" sz="3000" b="1" dirty="0">
+                <a:solidFill>
+                  <a:srgbClr val="155E56"/>
+                </a:solidFill>
+                <a:latin typeface="Georgia" pitchFamily="34" charset="0"/>
+                <a:ea typeface="Georgia" pitchFamily="34" charset="-122"/>
+                <a:cs typeface="Georgia" pitchFamily="34" charset="-120"/>
+              </a:rPr>
+              <a:t>Como Participar</a:t>
+            </a:r>
+            <a:endParaRPr lang="en-US" sz="3000" dirty="0"/>
+          </a:p>
+        </p:txBody>
+      </p:sp>
+      <p:sp>
+        <p:nvSpPr>
+          <p:cNvPr id="5" name="Text 3"/>
+          <p:cNvSpPr/>
+          <p:nvPr/>
+        </p:nvSpPr>
+        <p:spPr>
+          <a:xfrm>
+            <a:off x="548640" y="1463040"/>
+            <a:ext cx="11091672" cy="457200"/>
+          </a:xfrm>
+          <a:prstGeom prst="rect">
+            <a:avLst/>
+          </a:prstGeom>
+          <a:noFill/>
+          <a:ln/>
+        </p:spPr>
+        <p:txBody>
+          <a:bodyPr wrap="square" lIns="0" tIns="0" rIns="0" bIns="0" rtlCol="0" anchor="ctr"/>
+          <a:lstStyle/>
+          <a:p>
+            <a:pPr indent="0" marL="0">
+              <a:buNone/>
+            </a:pPr>
+            <a:r>
+              <a:rPr lang="en-US" sz="1800" b="1" dirty="0">
+                <a:solidFill>
+                  <a:srgbClr val="155E56"/>
+                </a:solidFill>
+                <a:latin typeface="Arial" pitchFamily="34" charset="0"/>
+                <a:ea typeface="Arial" pitchFamily="34" charset="-122"/>
+                <a:cs typeface="Arial" pitchFamily="34" charset="-120"/>
+              </a:rPr>
+              <a:t>Plataforma: </a:t>
+            </a:r>
+            <a:pPr indent="0" marL="0">
+              <a:buNone/>
+            </a:pPr>
+            <a:r>
+              <a:rPr lang="en-US" sz="1800" b="1" dirty="0">
+                <a:solidFill>
+                  <a:srgbClr val="D97B1E"/>
+                </a:solidFill>
+                <a:latin typeface="Arial" pitchFamily="34" charset="0"/>
+                <a:ea typeface="Arial" pitchFamily="34" charset="-122"/>
+                <a:cs typeface="Arial" pitchFamily="34" charset="-120"/>
+              </a:rPr>
+              <a:t>teste.beanshealth.com.br/teste</a:t>
+            </a:r>
+            <a:endParaRPr lang="en-US" sz="1800" dirty="0"/>
+          </a:p>
+        </p:txBody>
+      </p:sp>
+      <p:sp>
+        <p:nvSpPr>
+          <p:cNvPr id="6" name="Text 4"/>
+          <p:cNvSpPr/>
+          <p:nvPr/>
+        </p:nvSpPr>
+        <p:spPr>
+          <a:xfrm>
+            <a:off x="548640" y="2103120"/>
+            <a:ext cx="11091672" cy="457200"/>
+          </a:xfrm>
+          <a:prstGeom prst="rect">
+            <a:avLst/>
+          </a:prstGeom>
+          <a:noFill/>
+          <a:ln/>
+        </p:spPr>
+        <p:txBody>
+          <a:bodyPr wrap="square" lIns="0" tIns="0" rIns="0" bIns="0" rtlCol="0" anchor="ctr"/>
+          <a:lstStyle/>
+          <a:p>
+            <a:pPr indent="0" marL="0">
+              <a:buNone/>
+            </a:pPr>
+            <a:r>
+              <a:rPr lang="en-US" sz="1500" b="1" dirty="0">
+                <a:solidFill>
+                  <a:srgbClr val="155E56"/>
+                </a:solidFill>
+                <a:latin typeface="Arial" pitchFamily="34" charset="0"/>
+                <a:ea typeface="Arial" pitchFamily="34" charset="-122"/>
+                <a:cs typeface="Arial" pitchFamily="34" charset="-120"/>
+              </a:rPr>
+              <a:t>Conteúdo: </a:t>
+            </a:r>
+            <a:pPr indent="0" marL="0">
+              <a:buNone/>
+            </a:pPr>
+            <a:r>
+              <a:rPr lang="en-US" sz="1500" dirty="0">
+                <a:solidFill>
+                  <a:srgbClr val="18211F"/>
+                </a:solidFill>
+                <a:latin typeface="Arial" pitchFamily="34" charset="0"/>
+                <a:ea typeface="Arial" pitchFamily="34" charset="-122"/>
+                <a:cs typeface="Arial" pitchFamily="34" charset="-120"/>
+              </a:rPr>
+              <a:t>200 casos · 9 modelos anônimos · formulário integrado · pausar/continuar</a:t>
+            </a:r>
+            <a:endParaRPr lang="en-US" sz="1500" dirty="0"/>
+          </a:p>
+        </p:txBody>
+      </p:sp>
+      <p:sp>
+        <p:nvSpPr>
+          <p:cNvPr id="7" name="Text 5"/>
+          <p:cNvSpPr/>
+          <p:nvPr/>
+        </p:nvSpPr>
+        <p:spPr>
+          <a:xfrm>
+            <a:off x="548640" y="2743200"/>
+            <a:ext cx="11091672" cy="457200"/>
+          </a:xfrm>
+          <a:prstGeom prst="rect">
+            <a:avLst/>
+          </a:prstGeom>
+          <a:noFill/>
+          <a:ln/>
+        </p:spPr>
+        <p:txBody>
+          <a:bodyPr wrap="square" lIns="0" tIns="0" rIns="0" bIns="0" rtlCol="0" anchor="ctr"/>
+          <a:lstStyle/>
+          <a:p>
+            <a:pPr indent="0" marL="0">
+              <a:buNone/>
+            </a:pPr>
+            <a:r>
+              <a:rPr lang="en-US" sz="1500" b="1" dirty="0">
+                <a:solidFill>
+                  <a:srgbClr val="155E56"/>
+                </a:solidFill>
+                <a:latin typeface="Arial" pitchFamily="34" charset="0"/>
+                <a:ea typeface="Arial" pitchFamily="34" charset="-122"/>
+                <a:cs typeface="Arial" pitchFamily="34" charset="-120"/>
+              </a:rPr>
+              <a:t>Prazo: </a:t>
+            </a:r>
+            <a:pPr indent="0" marL="0">
+              <a:buNone/>
+            </a:pPr>
+            <a:r>
+              <a:rPr lang="en-US" sz="1500" dirty="0">
+                <a:solidFill>
+                  <a:srgbClr val="18211F"/>
+                </a:solidFill>
+                <a:latin typeface="Arial" pitchFamily="34" charset="0"/>
+                <a:ea typeface="Arial" pitchFamily="34" charset="-122"/>
+                <a:cs typeface="Arial" pitchFamily="34" charset="-120"/>
+              </a:rPr>
+              <a:t>2 a 4 semanas ({~}6 horas, divisível em sessões de 30-60 min)</a:t>
+            </a:r>
+            <a:endParaRPr lang="en-US" sz="1500" dirty="0"/>
+          </a:p>
+        </p:txBody>
+      </p:sp>
+      <p:sp>
+        <p:nvSpPr>
+          <p:cNvPr id="8" name="Shape 6"/>
+          <p:cNvSpPr/>
+          <p:nvPr/>
+        </p:nvSpPr>
+        <p:spPr>
+          <a:xfrm>
+            <a:off x="548640" y="3474720"/>
+            <a:ext cx="11091672" cy="0"/>
+          </a:xfrm>
+          <a:prstGeom prst="line">
+            <a:avLst/>
+          </a:prstGeom>
+          <a:noFill/>
+          <a:ln w="9525">
+            <a:solidFill>
+              <a:srgbClr val="CFDCD9"/>
+            </a:solidFill>
+            <a:prstDash val="solid"/>
+          </a:ln>
+        </p:spPr>
+      </p:sp>
+      <p:sp>
+        <p:nvSpPr>
+          <p:cNvPr id="9" name="Text 7"/>
+          <p:cNvSpPr/>
+          <p:nvPr/>
+        </p:nvSpPr>
+        <p:spPr>
+          <a:xfrm>
+            <a:off x="548640" y="3657600"/>
+            <a:ext cx="11091672" cy="731520"/>
+          </a:xfrm>
+          <a:prstGeom prst="rect">
+            <a:avLst/>
+          </a:prstGeom>
+          <a:noFill/>
+          <a:ln/>
+        </p:spPr>
+        <p:txBody>
+          <a:bodyPr wrap="square" lIns="0" tIns="0" rIns="0" bIns="0" rtlCol="0" anchor="ctr"/>
+          <a:lstStyle/>
+          <a:p>
+            <a:pPr indent="0" marL="0">
+              <a:buNone/>
+            </a:pPr>
+            <a:r>
+              <a:rPr lang="en-US" sz="1600" b="1" dirty="0">
+                <a:solidFill>
+                  <a:srgbClr val="DC2626"/>
+                </a:solidFill>
+                <a:latin typeface="Arial" pitchFamily="34" charset="0"/>
+                <a:ea typeface="Arial" pitchFamily="34" charset="-122"/>
+                <a:cs typeface="Arial" pitchFamily="34" charset="-120"/>
+              </a:rPr>
+              <a:t>Importante: </a:t>
+            </a:r>
+            <a:pPr indent="0" marL="0">
+              <a:buNone/>
+            </a:pPr>
+            <a:r>
+              <a:rPr lang="en-US" sz="1500" dirty="0">
+                <a:solidFill>
+                  <a:srgbClr val="18211F"/>
+                </a:solidFill>
+                <a:latin typeface="Arial" pitchFamily="34" charset="0"/>
+                <a:ea typeface="Arial" pitchFamily="34" charset="-122"/>
+                <a:cs typeface="Arial" pitchFamily="34" charset="-120"/>
+              </a:rPr>
+              <a:t>a identidade dos modelos é revelada apenas após a conclusão — para garantir avaliação isenta. Não consulte o gabarito antes de terminar.</a:t>
+            </a:r>
+            <a:endParaRPr lang="en-US" sz="1600" dirty="0"/>
+          </a:p>
+        </p:txBody>
+      </p:sp>
+      <p:sp>
+        <p:nvSpPr>
+          <p:cNvPr id="10" name="Shape 8"/>
+          <p:cNvSpPr/>
+          <p:nvPr/>
+        </p:nvSpPr>
+        <p:spPr>
+          <a:xfrm>
+            <a:off x="548640" y="4572000"/>
+            <a:ext cx="11091672" cy="0"/>
+          </a:xfrm>
+          <a:prstGeom prst="line">
+            <a:avLst/>
+          </a:prstGeom>
+          <a:noFill/>
+          <a:ln w="9525">
+            <a:solidFill>
+              <a:srgbClr val="CFDCD9"/>
+            </a:solidFill>
+            <a:prstDash val="solid"/>
+          </a:ln>
+        </p:spPr>
+      </p:sp>
+      <p:sp>
+        <p:nvSpPr>
+          <p:cNvPr id="11" name="Text 9"/>
+          <p:cNvSpPr/>
+          <p:nvPr/>
+        </p:nvSpPr>
+        <p:spPr>
+          <a:xfrm>
+            <a:off x="548640" y="4846320"/>
+            <a:ext cx="9144000" cy="457200"/>
+          </a:xfrm>
+          <a:prstGeom prst="rect">
+            <a:avLst/>
+          </a:prstGeom>
+          <a:noFill/>
+          <a:ln/>
+        </p:spPr>
+        <p:txBody>
+          <a:bodyPr wrap="square" lIns="0" tIns="0" rIns="0" bIns="0" rtlCol="0" anchor="ctr"/>
+          <a:lstStyle/>
+          <a:p>
+            <a:pPr indent="0" marL="0">
+              <a:buNone/>
+            </a:pPr>
+            <a:r>
+              <a:rPr lang="en-US" sz="1400" b="1" dirty="0">
+                <a:solidFill>
+                  <a:srgbClr val="1A3C34"/>
+                </a:solidFill>
+                <a:latin typeface="Arial" pitchFamily="34" charset="0"/>
+                <a:ea typeface="Arial" pitchFamily="34" charset="-122"/>
+                <a:cs typeface="Arial" pitchFamily="34" charset="-120"/>
+              </a:rPr>
+              <a:t>Matheus Feijão · WhatsApp +55 11 92507-9058 · matheus@beanstech.com.br</a:t>
+            </a:r>
+            <a:endParaRPr lang="en-US" sz="1400" dirty="0"/>
+          </a:p>
+        </p:txBody>
+      </p:sp>
+      <p:sp>
+        <p:nvSpPr>
+          <p:cNvPr id="12" name="Text 10"/>
+          <p:cNvSpPr/>
+          <p:nvPr/>
+        </p:nvSpPr>
+        <p:spPr>
+          <a:xfrm>
+            <a:off x="548640" y="5577840"/>
+            <a:ext cx="9144000" cy="457200"/>
+          </a:xfrm>
+          <a:prstGeom prst="rect">
+            <a:avLst/>
+          </a:prstGeom>
+          <a:noFill/>
+          <a:ln/>
+        </p:spPr>
+        <p:txBody>
+          <a:bodyPr wrap="square" lIns="0" tIns="0" rIns="0" bIns="0" rtlCol="0" anchor="ctr"/>
+          <a:lstStyle/>
+          <a:p>
+            <a:pPr indent="0" marL="0">
+              <a:buNone/>
+            </a:pPr>
+            <a:r>
+              <a:rPr lang="en-US" sz="2000" i="1" dirty="0">
+                <a:solidFill>
+                  <a:srgbClr val="155E56"/>
+                </a:solidFill>
+                <a:latin typeface="Georgia" pitchFamily="34" charset="0"/>
+                <a:ea typeface="Georgia" pitchFamily="34" charset="-122"/>
+                <a:cs typeface="Georgia" pitchFamily="34" charset="-120"/>
+              </a:rPr>
+              <a:t>A IA é sempre um meio. </a:t>
+            </a:r>
+            <a:pPr indent="0" marL="0">
+              <a:buNone/>
+            </a:pPr>
+            <a:r>
+              <a:rPr lang="en-US" sz="2000" b="1" i="1" dirty="0">
+                <a:solidFill>
+                  <a:srgbClr val="D97B1E"/>
+                </a:solidFill>
+                <a:latin typeface="Georgia" pitchFamily="34" charset="0"/>
+                <a:ea typeface="Georgia" pitchFamily="34" charset="-122"/>
+                <a:cs typeface="Georgia" pitchFamily="34" charset="-120"/>
+              </a:rPr>
+              <a:t>O médico decide. Sempre.</a:t>
+            </a:r>
+            <a:endParaRPr lang="en-US" sz="2000" dirty="0"/>
           </a:p>
         </p:txBody>
       </p:sp>
@@ -1875,7 +2552,7 @@
                 <a:ea typeface="Georgia" pitchFamily="34" charset="-122"/>
                 <a:cs typeface="Georgia" pitchFamily="34" charset="-120"/>
               </a:rPr>
-              <a:t>O que é a ferramenta</a:t>
+              <a:t>Proteção dos Seus Dados</a:t>
             </a:r>
             <a:endParaRPr lang="en-US" sz="3000" dirty="0"/>
           </a:p>
@@ -1914,7 +2591,7 @@
                 <a:ea typeface="Arial" pitchFamily="34" charset="-122"/>
                 <a:cs typeface="Arial" pitchFamily="34" charset="-120"/>
               </a:rPr>
-              <a:t>Apoio à decisão clínica — nunca diagnóstico autônomo</a:t>
+              <a:t>Conforme a Lei Geral de Proteção de Dados (LGPD) — Lei 13.709/2018</a:t>
             </a:r>
             <a:endParaRPr lang="en-US" sz="1500" dirty="0"/>
           </a:p>
@@ -1928,7 +2605,7 @@
         </p:nvSpPr>
         <p:spPr>
           <a:xfrm>
-            <a:off x="548640" y="1627632"/>
+            <a:off x="548640" y="1517904"/>
             <a:ext cx="128016" cy="128016"/>
           </a:xfrm>
           <a:prstGeom prst="rect">
@@ -1953,24 +2630,63 @@
         </p:nvSpPr>
         <p:spPr>
           <a:xfrm>
-            <a:off x="868680" y="1554480"/>
-            <a:ext cx="10058400" cy="640080"/>
-          </a:xfrm>
-          <a:prstGeom prst="rect">
-            <a:avLst/>
-          </a:prstGeom>
-          <a:noFill/>
-          <a:ln/>
-        </p:spPr>
-        <p:txBody>
-          <a:bodyPr wrap="square" lIns="0" tIns="0" rIns="0" bIns="0" rtlCol="0" anchor="t"/>
-          <a:lstStyle/>
-          <a:p>
-            <a:pPr indent="0" marL="0">
-              <a:buNone/>
-            </a:pPr>
-            <a:r>
-              <a:rPr lang="en-US" sz="1500" dirty="0">
+            <a:off x="822960" y="1463040"/>
+            <a:ext cx="5303520" cy="320040"/>
+          </a:xfrm>
+          <a:prstGeom prst="rect">
+            <a:avLst/>
+          </a:prstGeom>
+          <a:noFill/>
+          <a:ln/>
+        </p:spPr>
+        <p:txBody>
+          <a:bodyPr wrap="square" lIns="0" tIns="0" rIns="0" bIns="0" rtlCol="0" anchor="ctr"/>
+          <a:lstStyle/>
+          <a:p>
+            <a:pPr indent="0" marL="0">
+              <a:buNone/>
+            </a:pPr>
+            <a:r>
+              <a:rPr lang="en-US" sz="1500" b="1" dirty="0">
+                <a:solidFill>
+                  <a:srgbClr val="155E56"/>
+                </a:solidFill>
+                <a:latin typeface="Arial" pitchFamily="34" charset="0"/>
+                <a:ea typeface="Arial" pitchFamily="34" charset="-122"/>
+                <a:cs typeface="Arial" pitchFamily="34" charset="-120"/>
+              </a:rPr>
+              <a:t>Anonimização automática</a:t>
+            </a:r>
+            <a:endParaRPr lang="en-US" sz="1500" dirty="0"/>
+          </a:p>
+        </p:txBody>
+      </p:sp>
+      <p:sp>
+        <p:nvSpPr>
+          <p:cNvPr id="8" name="Text 6"/>
+          <p:cNvSpPr/>
+          <p:nvPr/>
+        </p:nvSpPr>
+        <p:spPr>
+          <a:xfrm>
+            <a:off x="822960" y="1810512"/>
+            <a:ext cx="5303520" cy="914400"/>
+          </a:xfrm>
+          <a:prstGeom prst="rect">
+            <a:avLst/>
+          </a:prstGeom>
+          <a:noFill/>
+          <a:ln/>
+        </p:spPr>
+        <p:txBody>
+          <a:bodyPr wrap="square" lIns="0" tIns="0" rIns="0" bIns="0" rtlCol="0" anchor="ctr"/>
+          <a:lstStyle/>
+          <a:p>
+            <a:pPr indent="0" marL="0">
+              <a:buNone/>
+            </a:pPr>
+            <a:r>
+              <a:rPr lang="en-US" sz="1150" dirty="0">
                 <a:solidFill>
                   <a:srgbClr val="18211F"/>
                 </a:solidFill>
@@ -1978,21 +2694,21 @@
                 <a:ea typeface="Arial" pitchFamily="34" charset="-122"/>
                 <a:cs typeface="Arial" pitchFamily="34" charset="-120"/>
               </a:rPr>
-              <a:t>Não substitui o médico. O profissional descreve o caso, a ferramenta estrutura o raciocínio, o médico decide.</a:t>
-            </a:r>
-            <a:endParaRPr lang="en-US" sz="1500" dirty="0"/>
-          </a:p>
-        </p:txBody>
-      </p:sp>
-      <p:sp>
-        <p:nvSpPr>
-          <p:cNvPr id="8" name="Shape 6"/>
-          <p:cNvSpPr/>
-          <p:nvPr/>
-        </p:nvSpPr>
-        <p:spPr>
-          <a:xfrm>
-            <a:off x="548640" y="2404872"/>
+              <a:t>Seu nome, CRM e e-mail são usados apenas para registro de autoria da revisão. Nenhum dado pessoal seu é compartilhado com terceiros sem consentimento expresso.</a:t>
+            </a:r>
+            <a:endParaRPr lang="en-US" sz="1150" dirty="0"/>
+          </a:p>
+        </p:txBody>
+      </p:sp>
+      <p:sp>
+        <p:nvSpPr>
+          <p:cNvPr id="9" name="Shape 7"/>
+          <p:cNvSpPr/>
+          <p:nvPr/>
+        </p:nvSpPr>
+        <p:spPr>
+          <a:xfrm>
+            <a:off x="6309360" y="1517904"/>
             <a:ext cx="128016" cy="128016"/>
           </a:xfrm>
           <a:prstGeom prst="rect">
@@ -2011,30 +2727,69 @@
       </p:sp>
       <p:sp>
         <p:nvSpPr>
-          <p:cNvPr id="9" name="Text 7"/>
-          <p:cNvSpPr/>
-          <p:nvPr/>
-        </p:nvSpPr>
-        <p:spPr>
-          <a:xfrm>
-            <a:off x="868680" y="2331720"/>
-            <a:ext cx="10058400" cy="640080"/>
-          </a:xfrm>
-          <a:prstGeom prst="rect">
-            <a:avLst/>
-          </a:prstGeom>
-          <a:noFill/>
-          <a:ln/>
-        </p:spPr>
-        <p:txBody>
-          <a:bodyPr wrap="square" lIns="0" tIns="0" rIns="0" bIns="0" rtlCol="0" anchor="t"/>
-          <a:lstStyle/>
-          <a:p>
-            <a:pPr indent="0" marL="0">
-              <a:buNone/>
-            </a:pPr>
-            <a:r>
-              <a:rPr lang="en-US" sz="1500" dirty="0">
+          <p:cNvPr id="10" name="Text 8"/>
+          <p:cNvSpPr/>
+          <p:nvPr/>
+        </p:nvSpPr>
+        <p:spPr>
+          <a:xfrm>
+            <a:off x="6583680" y="1463040"/>
+            <a:ext cx="5303520" cy="320040"/>
+          </a:xfrm>
+          <a:prstGeom prst="rect">
+            <a:avLst/>
+          </a:prstGeom>
+          <a:noFill/>
+          <a:ln/>
+        </p:spPr>
+        <p:txBody>
+          <a:bodyPr wrap="square" lIns="0" tIns="0" rIns="0" bIns="0" rtlCol="0" anchor="ctr"/>
+          <a:lstStyle/>
+          <a:p>
+            <a:pPr indent="0" marL="0">
+              <a:buNone/>
+            </a:pPr>
+            <a:r>
+              <a:rPr lang="en-US" sz="1500" b="1" dirty="0">
+                <a:solidFill>
+                  <a:srgbClr val="155E56"/>
+                </a:solidFill>
+                <a:latin typeface="Arial" pitchFamily="34" charset="0"/>
+                <a:ea typeface="Arial" pitchFamily="34" charset="-122"/>
+                <a:cs typeface="Arial" pitchFamily="34" charset="-120"/>
+              </a:rPr>
+              <a:t>Dados clínicos anônimos</a:t>
+            </a:r>
+            <a:endParaRPr lang="en-US" sz="1500" dirty="0"/>
+          </a:p>
+        </p:txBody>
+      </p:sp>
+      <p:sp>
+        <p:nvSpPr>
+          <p:cNvPr id="11" name="Text 9"/>
+          <p:cNvSpPr/>
+          <p:nvPr/>
+        </p:nvSpPr>
+        <p:spPr>
+          <a:xfrm>
+            <a:off x="6583680" y="1810512"/>
+            <a:ext cx="5303520" cy="914400"/>
+          </a:xfrm>
+          <a:prstGeom prst="rect">
+            <a:avLst/>
+          </a:prstGeom>
+          <a:noFill/>
+          <a:ln/>
+        </p:spPr>
+        <p:txBody>
+          <a:bodyPr wrap="square" lIns="0" tIns="0" rIns="0" bIns="0" rtlCol="0" anchor="ctr"/>
+          <a:lstStyle/>
+          <a:p>
+            <a:pPr indent="0" marL="0">
+              <a:buNone/>
+            </a:pPr>
+            <a:r>
+              <a:rPr lang="en-US" sz="1150" dirty="0">
                 <a:solidFill>
                   <a:srgbClr val="18211F"/>
                 </a:solidFill>
@@ -2042,21 +2797,21 @@
                 <a:ea typeface="Arial" pitchFamily="34" charset="-122"/>
                 <a:cs typeface="Arial" pitchFamily="34" charset="-120"/>
               </a:rPr>
-              <a:t>Se abstém quando não sabe. Se a evidência é insuficiente, a resposta é 'insufficient' — não um chute.</a:t>
-            </a:r>
-            <a:endParaRPr lang="en-US" sz="1500" dirty="0"/>
-          </a:p>
-        </p:txBody>
-      </p:sp>
-      <p:sp>
-        <p:nvSpPr>
-          <p:cNvPr id="10" name="Shape 8"/>
-          <p:cNvSpPr/>
-          <p:nvPr/>
-        </p:nvSpPr>
-        <p:spPr>
-          <a:xfrm>
-            <a:off x="548640" y="3182112"/>
+              <a:t>Os 200 casos clínicos são anônimos ou sintéticos. Não contêm nome, CPF, prontuário ou qualquer identificador de paciente real.</a:t>
+            </a:r>
+            <a:endParaRPr lang="en-US" sz="1150" dirty="0"/>
+          </a:p>
+        </p:txBody>
+      </p:sp>
+      <p:sp>
+        <p:nvSpPr>
+          <p:cNvPr id="12" name="Shape 10"/>
+          <p:cNvSpPr/>
+          <p:nvPr/>
+        </p:nvSpPr>
+        <p:spPr>
+          <a:xfrm>
+            <a:off x="548640" y="2935224"/>
             <a:ext cx="128016" cy="128016"/>
           </a:xfrm>
           <a:prstGeom prst="rect">
@@ -2075,30 +2830,69 @@
       </p:sp>
       <p:sp>
         <p:nvSpPr>
-          <p:cNvPr id="11" name="Text 9"/>
-          <p:cNvSpPr/>
-          <p:nvPr/>
-        </p:nvSpPr>
-        <p:spPr>
-          <a:xfrm>
-            <a:off x="868680" y="3108960"/>
-            <a:ext cx="10058400" cy="640080"/>
-          </a:xfrm>
-          <a:prstGeom prst="rect">
-            <a:avLst/>
-          </a:prstGeom>
-          <a:noFill/>
-          <a:ln/>
-        </p:spPr>
-        <p:txBody>
-          <a:bodyPr wrap="square" lIns="0" tIns="0" rIns="0" bIns="0" rtlCol="0" anchor="t"/>
-          <a:lstStyle/>
-          <a:p>
-            <a:pPr indent="0" marL="0">
-              <a:buNone/>
-            </a:pPr>
-            <a:r>
-              <a:rPr lang="en-US" sz="1500" dirty="0">
+          <p:cNvPr id="13" name="Text 11"/>
+          <p:cNvSpPr/>
+          <p:nvPr/>
+        </p:nvSpPr>
+        <p:spPr>
+          <a:xfrm>
+            <a:off x="822960" y="2880360"/>
+            <a:ext cx="5303520" cy="320040"/>
+          </a:xfrm>
+          <a:prstGeom prst="rect">
+            <a:avLst/>
+          </a:prstGeom>
+          <a:noFill/>
+          <a:ln/>
+        </p:spPr>
+        <p:txBody>
+          <a:bodyPr wrap="square" lIns="0" tIns="0" rIns="0" bIns="0" rtlCol="0" anchor="ctr"/>
+          <a:lstStyle/>
+          <a:p>
+            <a:pPr indent="0" marL="0">
+              <a:buNone/>
+            </a:pPr>
+            <a:r>
+              <a:rPr lang="en-US" sz="1500" b="1" dirty="0">
+                <a:solidFill>
+                  <a:srgbClr val="155E56"/>
+                </a:solidFill>
+                <a:latin typeface="Arial" pitchFamily="34" charset="0"/>
+                <a:ea typeface="Arial" pitchFamily="34" charset="-122"/>
+                <a:cs typeface="Arial" pitchFamily="34" charset="-120"/>
+              </a:rPr>
+              <a:t>Direito ao esquecimento</a:t>
+            </a:r>
+            <a:endParaRPr lang="en-US" sz="1500" dirty="0"/>
+          </a:p>
+        </p:txBody>
+      </p:sp>
+      <p:sp>
+        <p:nvSpPr>
+          <p:cNvPr id="14" name="Text 12"/>
+          <p:cNvSpPr/>
+          <p:nvPr/>
+        </p:nvSpPr>
+        <p:spPr>
+          <a:xfrm>
+            <a:off x="822960" y="3227832"/>
+            <a:ext cx="5303520" cy="914400"/>
+          </a:xfrm>
+          <a:prstGeom prst="rect">
+            <a:avLst/>
+          </a:prstGeom>
+          <a:noFill/>
+          <a:ln/>
+        </p:spPr>
+        <p:txBody>
+          <a:bodyPr wrap="square" lIns="0" tIns="0" rIns="0" bIns="0" rtlCol="0" anchor="ctr"/>
+          <a:lstStyle/>
+          <a:p>
+            <a:pPr indent="0" marL="0">
+              <a:buNone/>
+            </a:pPr>
+            <a:r>
+              <a:rPr lang="en-US" sz="1150" dirty="0">
                 <a:solidFill>
                   <a:srgbClr val="18211F"/>
                 </a:solidFill>
@@ -2106,21 +2900,21 @@
                 <a:ea typeface="Arial" pitchFamily="34" charset="-122"/>
                 <a:cs typeface="Arial" pitchFamily="34" charset="-120"/>
               </a:rPr>
-              <a:t>Nunca inventa dose. Quando não tem certeza, diz 'confirmar em bula/protocolo vigente'.</a:t>
-            </a:r>
-            <a:endParaRPr lang="en-US" sz="1500" dirty="0"/>
-          </a:p>
-        </p:txBody>
-      </p:sp>
-      <p:sp>
-        <p:nvSpPr>
-          <p:cNvPr id="12" name="Shape 10"/>
-          <p:cNvSpPr/>
-          <p:nvPr/>
-        </p:nvSpPr>
-        <p:spPr>
-          <a:xfrm>
-            <a:off x="548640" y="3959352"/>
+              <a:t>A qualquer momento, você pode solicitar a exclusão dos seus dados de revisão. Basta um email para matheus@beanstech.com.br.</a:t>
+            </a:r>
+            <a:endParaRPr lang="en-US" sz="1150" dirty="0"/>
+          </a:p>
+        </p:txBody>
+      </p:sp>
+      <p:sp>
+        <p:nvSpPr>
+          <p:cNvPr id="15" name="Shape 13"/>
+          <p:cNvSpPr/>
+          <p:nvPr/>
+        </p:nvSpPr>
+        <p:spPr>
+          <a:xfrm>
+            <a:off x="6309360" y="2935224"/>
             <a:ext cx="128016" cy="128016"/>
           </a:xfrm>
           <a:prstGeom prst="rect">
@@ -2139,30 +2933,69 @@
       </p:sp>
       <p:sp>
         <p:nvSpPr>
-          <p:cNvPr id="13" name="Text 11"/>
-          <p:cNvSpPr/>
-          <p:nvPr/>
-        </p:nvSpPr>
-        <p:spPr>
-          <a:xfrm>
-            <a:off x="868680" y="3886200"/>
-            <a:ext cx="10058400" cy="640080"/>
-          </a:xfrm>
-          <a:prstGeom prst="rect">
-            <a:avLst/>
-          </a:prstGeom>
-          <a:noFill/>
-          <a:ln/>
-        </p:spPr>
-        <p:txBody>
-          <a:bodyPr wrap="square" lIns="0" tIns="0" rIns="0" bIns="0" rtlCol="0" anchor="t"/>
-          <a:lstStyle/>
-          <a:p>
-            <a:pPr indent="0" marL="0">
-              <a:buNone/>
-            </a:pPr>
-            <a:r>
-              <a:rPr lang="en-US" sz="1500" dirty="0">
+          <p:cNvPr id="16" name="Text 14"/>
+          <p:cNvSpPr/>
+          <p:nvPr/>
+        </p:nvSpPr>
+        <p:spPr>
+          <a:xfrm>
+            <a:off x="6583680" y="2880360"/>
+            <a:ext cx="5303520" cy="320040"/>
+          </a:xfrm>
+          <a:prstGeom prst="rect">
+            <a:avLst/>
+          </a:prstGeom>
+          <a:noFill/>
+          <a:ln/>
+        </p:spPr>
+        <p:txBody>
+          <a:bodyPr wrap="square" lIns="0" tIns="0" rIns="0" bIns="0" rtlCol="0" anchor="ctr"/>
+          <a:lstStyle/>
+          <a:p>
+            <a:pPr indent="0" marL="0">
+              <a:buNone/>
+            </a:pPr>
+            <a:r>
+              <a:rPr lang="en-US" sz="1500" b="1" dirty="0">
+                <a:solidFill>
+                  <a:srgbClr val="155E56"/>
+                </a:solidFill>
+                <a:latin typeface="Arial" pitchFamily="34" charset="0"/>
+                <a:ea typeface="Arial" pitchFamily="34" charset="-122"/>
+                <a:cs typeface="Arial" pitchFamily="34" charset="-120"/>
+              </a:rPr>
+              <a:t>Finalidade específica</a:t>
+            </a:r>
+            <a:endParaRPr lang="en-US" sz="1500" dirty="0"/>
+          </a:p>
+        </p:txBody>
+      </p:sp>
+      <p:sp>
+        <p:nvSpPr>
+          <p:cNvPr id="17" name="Text 15"/>
+          <p:cNvSpPr/>
+          <p:nvPr/>
+        </p:nvSpPr>
+        <p:spPr>
+          <a:xfrm>
+            <a:off x="6583680" y="3227832"/>
+            <a:ext cx="5303520" cy="914400"/>
+          </a:xfrm>
+          <a:prstGeom prst="rect">
+            <a:avLst/>
+          </a:prstGeom>
+          <a:noFill/>
+          <a:ln/>
+        </p:spPr>
+        <p:txBody>
+          <a:bodyPr wrap="square" lIns="0" tIns="0" rIns="0" bIns="0" rtlCol="0" anchor="ctr"/>
+          <a:lstStyle/>
+          <a:p>
+            <a:pPr indent="0" marL="0">
+              <a:buNone/>
+            </a:pPr>
+            <a:r>
+              <a:rPr lang="en-US" sz="1150" dirty="0">
                 <a:solidFill>
                   <a:srgbClr val="18211F"/>
                 </a:solidFill>
@@ -2170,21 +3003,21 @@
                 <a:ea typeface="Arial" pitchFamily="34" charset="-122"/>
                 <a:cs typeface="Arial" pitchFamily="34" charset="-120"/>
               </a:rPr>
-              <a:t>É auditável. Cada resposta tem modelo, versão, raciocínio, tokens, tempo e guardrail — tudo registrado.</a:t>
-            </a:r>
-            <a:endParaRPr lang="en-US" sz="1500" dirty="0"/>
-          </a:p>
-        </p:txBody>
-      </p:sp>
-      <p:sp>
-        <p:nvSpPr>
-          <p:cNvPr id="14" name="Shape 12"/>
-          <p:cNvSpPr/>
-          <p:nvPr/>
-        </p:nvSpPr>
-        <p:spPr>
-          <a:xfrm>
-            <a:off x="548640" y="4736592"/>
+              <a:t>Suas avaliações são usadas exclusivamente para validar a qualidade e segurança de ferramentas de IA médica. Nunca para treinamento, marketing ou venda.</a:t>
+            </a:r>
+            <a:endParaRPr lang="en-US" sz="1150" dirty="0"/>
+          </a:p>
+        </p:txBody>
+      </p:sp>
+      <p:sp>
+        <p:nvSpPr>
+          <p:cNvPr id="18" name="Shape 16"/>
+          <p:cNvSpPr/>
+          <p:nvPr/>
+        </p:nvSpPr>
+        <p:spPr>
+          <a:xfrm>
+            <a:off x="548640" y="4352544"/>
             <a:ext cx="128016" cy="128016"/>
           </a:xfrm>
           <a:prstGeom prst="rect">
@@ -2203,30 +3036,69 @@
       </p:sp>
       <p:sp>
         <p:nvSpPr>
-          <p:cNvPr id="15" name="Text 13"/>
-          <p:cNvSpPr/>
-          <p:nvPr/>
-        </p:nvSpPr>
-        <p:spPr>
-          <a:xfrm>
-            <a:off x="868680" y="4663440"/>
-            <a:ext cx="10058400" cy="640080"/>
-          </a:xfrm>
-          <a:prstGeom prst="rect">
-            <a:avLst/>
-          </a:prstGeom>
-          <a:noFill/>
-          <a:ln/>
-        </p:spPr>
-        <p:txBody>
-          <a:bodyPr wrap="square" lIns="0" tIns="0" rIns="0" bIns="0" rtlCol="0" anchor="t"/>
-          <a:lstStyle/>
-          <a:p>
-            <a:pPr indent="0" marL="0">
-              <a:buNone/>
-            </a:pPr>
-            <a:r>
-              <a:rPr lang="en-US" sz="1500" dirty="0">
+          <p:cNvPr id="19" name="Text 17"/>
+          <p:cNvSpPr/>
+          <p:nvPr/>
+        </p:nvSpPr>
+        <p:spPr>
+          <a:xfrm>
+            <a:off x="822960" y="4297680"/>
+            <a:ext cx="5303520" cy="320040"/>
+          </a:xfrm>
+          <a:prstGeom prst="rect">
+            <a:avLst/>
+          </a:prstGeom>
+          <a:noFill/>
+          <a:ln/>
+        </p:spPr>
+        <p:txBody>
+          <a:bodyPr wrap="square" lIns="0" tIns="0" rIns="0" bIns="0" rtlCol="0" anchor="ctr"/>
+          <a:lstStyle/>
+          <a:p>
+            <a:pPr indent="0" marL="0">
+              <a:buNone/>
+            </a:pPr>
+            <a:r>
+              <a:rPr lang="en-US" sz="1500" b="1" dirty="0">
+                <a:solidFill>
+                  <a:srgbClr val="155E56"/>
+                </a:solidFill>
+                <a:latin typeface="Arial" pitchFamily="34" charset="0"/>
+                <a:ea typeface="Arial" pitchFamily="34" charset="-122"/>
+                <a:cs typeface="Arial" pitchFamily="34" charset="-120"/>
+              </a:rPr>
+              <a:t>Base legal</a:t>
+            </a:r>
+            <a:endParaRPr lang="en-US" sz="1500" dirty="0"/>
+          </a:p>
+        </p:txBody>
+      </p:sp>
+      <p:sp>
+        <p:nvSpPr>
+          <p:cNvPr id="20" name="Text 18"/>
+          <p:cNvSpPr/>
+          <p:nvPr/>
+        </p:nvSpPr>
+        <p:spPr>
+          <a:xfrm>
+            <a:off x="822960" y="4645152"/>
+            <a:ext cx="5303520" cy="914400"/>
+          </a:xfrm>
+          <a:prstGeom prst="rect">
+            <a:avLst/>
+          </a:prstGeom>
+          <a:noFill/>
+          <a:ln/>
+        </p:spPr>
+        <p:txBody>
+          <a:bodyPr wrap="square" lIns="0" tIns="0" rIns="0" bIns="0" rtlCol="0" anchor="ctr"/>
+          <a:lstStyle/>
+          <a:p>
+            <a:pPr indent="0" marL="0">
+              <a:buNone/>
+            </a:pPr>
+            <a:r>
+              <a:rPr lang="en-US" sz="1150" dirty="0">
                 <a:solidFill>
                   <a:srgbClr val="18211F"/>
                 </a:solidFill>
@@ -2234,9 +3106,112 @@
                 <a:ea typeface="Arial" pitchFamily="34" charset="-122"/>
                 <a:cs typeface="Arial" pitchFamily="34" charset="-120"/>
               </a:rPr>
-              <a:t>Remove dados pessoais antes de qualquer processamento. Nome, CPF e telefone são removidos em São Paulo.</a:t>
+              <a:t>Art. 7º, IX da LGPD: legítimo interesse — avaliação de qualidade de ferramentas de saúde. Art. 11: dados sensíveis tratados com cautela reforçada.</a:t>
+            </a:r>
+            <a:endParaRPr lang="en-US" sz="1150" dirty="0"/>
+          </a:p>
+        </p:txBody>
+      </p:sp>
+      <p:sp>
+        <p:nvSpPr>
+          <p:cNvPr id="21" name="Shape 19"/>
+          <p:cNvSpPr/>
+          <p:nvPr/>
+        </p:nvSpPr>
+        <p:spPr>
+          <a:xfrm>
+            <a:off x="6309360" y="4352544"/>
+            <a:ext cx="128016" cy="128016"/>
+          </a:xfrm>
+          <a:prstGeom prst="rect">
+            <a:avLst/>
+          </a:prstGeom>
+          <a:solidFill>
+            <a:srgbClr val="D97B1E"/>
+          </a:solidFill>
+          <a:ln w="12700">
+            <a:solidFill>
+              <a:srgbClr val="D97B1E"/>
+            </a:solidFill>
+            <a:prstDash val="solid"/>
+          </a:ln>
+        </p:spPr>
+      </p:sp>
+      <p:sp>
+        <p:nvSpPr>
+          <p:cNvPr id="22" name="Text 20"/>
+          <p:cNvSpPr/>
+          <p:nvPr/>
+        </p:nvSpPr>
+        <p:spPr>
+          <a:xfrm>
+            <a:off x="6583680" y="4297680"/>
+            <a:ext cx="5303520" cy="320040"/>
+          </a:xfrm>
+          <a:prstGeom prst="rect">
+            <a:avLst/>
+          </a:prstGeom>
+          <a:noFill/>
+          <a:ln/>
+        </p:spPr>
+        <p:txBody>
+          <a:bodyPr wrap="square" lIns="0" tIns="0" rIns="0" bIns="0" rtlCol="0" anchor="ctr"/>
+          <a:lstStyle/>
+          <a:p>
+            <a:pPr indent="0" marL="0">
+              <a:buNone/>
+            </a:pPr>
+            <a:r>
+              <a:rPr lang="en-US" sz="1500" b="1" dirty="0">
+                <a:solidFill>
+                  <a:srgbClr val="155E56"/>
+                </a:solidFill>
+                <a:latin typeface="Arial" pitchFamily="34" charset="0"/>
+                <a:ea typeface="Arial" pitchFamily="34" charset="-122"/>
+                <a:cs typeface="Arial" pitchFamily="34" charset="-120"/>
+              </a:rPr>
+              <a:t>Transparência</a:t>
             </a:r>
             <a:endParaRPr lang="en-US" sz="1500" dirty="0"/>
+          </a:p>
+        </p:txBody>
+      </p:sp>
+      <p:sp>
+        <p:nvSpPr>
+          <p:cNvPr id="23" name="Text 21"/>
+          <p:cNvSpPr/>
+          <p:nvPr/>
+        </p:nvSpPr>
+        <p:spPr>
+          <a:xfrm>
+            <a:off x="6583680" y="4645152"/>
+            <a:ext cx="5303520" cy="914400"/>
+          </a:xfrm>
+          <a:prstGeom prst="rect">
+            <a:avLst/>
+          </a:prstGeom>
+          <a:noFill/>
+          <a:ln/>
+        </p:spPr>
+        <p:txBody>
+          <a:bodyPr wrap="square" lIns="0" tIns="0" rIns="0" bIns="0" rtlCol="0" anchor="ctr"/>
+          <a:lstStyle/>
+          <a:p>
+            <a:pPr indent="0" marL="0">
+              <a:buNone/>
+            </a:pPr>
+            <a:r>
+              <a:rPr lang="en-US" sz="1150" dirty="0">
+                <a:solidFill>
+                  <a:srgbClr val="18211F"/>
+                </a:solidFill>
+                <a:latin typeface="Arial" pitchFamily="34" charset="0"/>
+                <a:ea typeface="Arial" pitchFamily="34" charset="-122"/>
+                <a:cs typeface="Arial" pitchFamily="34" charset="-120"/>
+              </a:rPr>
+              <a:t>Você pode solicitar a qualquer momento: quais dados seus temos, como são usados, e com quem são compartilhados. Resposta em 15 dias.</a:t>
+            </a:r>
+            <a:endParaRPr lang="en-US" sz="1150" dirty="0"/>
           </a:p>
         </p:txBody>
       </p:sp>
@@ -2383,7 +3358,7 @@
                 <a:ea typeface="Georgia" pitchFamily="34" charset="-122"/>
                 <a:cs typeface="Georgia" pitchFamily="34" charset="-120"/>
               </a:rPr>
-              <a:t>O que NÃO é</a:t>
+              <a:t>IA como Ferramenta de Apoio à Decisão Clínica</a:t>
             </a:r>
             <a:endParaRPr lang="en-US" sz="3000" dirty="0"/>
           </a:p>
@@ -2391,24 +3366,63 @@
       </p:sp>
       <p:sp>
         <p:nvSpPr>
-          <p:cNvPr id="5" name="Shape 3"/>
-          <p:cNvSpPr/>
-          <p:nvPr/>
-        </p:nvSpPr>
-        <p:spPr>
-          <a:xfrm>
-            <a:off x="548640" y="1719072"/>
+          <p:cNvPr id="5" name="Text 3"/>
+          <p:cNvSpPr/>
+          <p:nvPr/>
+        </p:nvSpPr>
+        <p:spPr>
+          <a:xfrm>
+            <a:off x="548640" y="1371600"/>
+            <a:ext cx="11091672" cy="548640"/>
+          </a:xfrm>
+          <a:prstGeom prst="rect">
+            <a:avLst/>
+          </a:prstGeom>
+          <a:noFill/>
+          <a:ln/>
+        </p:spPr>
+        <p:txBody>
+          <a:bodyPr wrap="square" lIns="0" tIns="0" rIns="0" bIns="0" rtlCol="0" anchor="ctr"/>
+          <a:lstStyle/>
+          <a:p>
+            <a:pPr indent="0" marL="0">
+              <a:buNone/>
+            </a:pPr>
+            <a:r>
+              <a:rPr lang="en-US" sz="2000" b="1" i="1" dirty="0">
+                <a:solidFill>
+                  <a:srgbClr val="D97B1E"/>
+                </a:solidFill>
+                <a:latin typeface="Georgia" pitchFamily="34" charset="0"/>
+                <a:ea typeface="Georgia" pitchFamily="34" charset="-122"/>
+                <a:cs typeface="Georgia" pitchFamily="34" charset="-120"/>
+              </a:rPr>
+              <a:t>A inteligência artificial é um meio. O médico é o fim. O paciente é o propósito.</a:t>
+            </a:r>
+            <a:endParaRPr lang="en-US" sz="2000" dirty="0"/>
+          </a:p>
+        </p:txBody>
+      </p:sp>
+      <p:sp>
+        <p:nvSpPr>
+          <p:cNvPr id="6" name="Shape 4"/>
+          <p:cNvSpPr/>
+          <p:nvPr/>
+        </p:nvSpPr>
+        <p:spPr>
+          <a:xfrm>
+            <a:off x="548640" y="2157984"/>
             <a:ext cx="128016" cy="128016"/>
           </a:xfrm>
           <a:prstGeom prst="rect">
             <a:avLst/>
           </a:prstGeom>
           <a:solidFill>
-            <a:srgbClr val="DC2626"/>
+            <a:srgbClr val="155E56"/>
           </a:solidFill>
           <a:ln w="12700">
             <a:solidFill>
-              <a:srgbClr val="DC2626"/>
+              <a:srgbClr val="155E56"/>
             </a:solidFill>
             <a:prstDash val="solid"/>
           </a:ln>
@@ -2416,63 +3430,102 @@
       </p:sp>
       <p:sp>
         <p:nvSpPr>
-          <p:cNvPr id="6" name="Text 4"/>
-          <p:cNvSpPr/>
-          <p:nvPr/>
-        </p:nvSpPr>
-        <p:spPr>
-          <a:xfrm>
-            <a:off x="822960" y="1645920"/>
-            <a:ext cx="5029200" cy="731520"/>
-          </a:xfrm>
-          <a:prstGeom prst="rect">
-            <a:avLst/>
-          </a:prstGeom>
-          <a:noFill/>
-          <a:ln/>
-        </p:spPr>
-        <p:txBody>
-          <a:bodyPr wrap="square" lIns="0" tIns="0" rIns="0" bIns="0" rtlCol="0" anchor="ctr"/>
-          <a:lstStyle/>
-          <a:p>
-            <a:pPr indent="0" marL="0">
-              <a:buNone/>
-            </a:pPr>
-            <a:r>
-              <a:rPr lang="en-US" sz="1600" b="1" dirty="0">
-                <a:solidFill>
-                  <a:srgbClr val="1A3C34"/>
-                </a:solidFill>
-                <a:latin typeface="Arial" pitchFamily="34" charset="0"/>
-                <a:ea typeface="Arial" pitchFamily="34" charset="-122"/>
-                <a:cs typeface="Arial" pitchFamily="34" charset="-120"/>
-              </a:rPr>
-              <a:t>Não é diagnóstico autônomo</a:t>
-            </a:r>
-            <a:endParaRPr lang="en-US" sz="1600" dirty="0"/>
-          </a:p>
-        </p:txBody>
-      </p:sp>
-      <p:sp>
-        <p:nvSpPr>
-          <p:cNvPr id="7" name="Shape 5"/>
-          <p:cNvSpPr/>
-          <p:nvPr/>
-        </p:nvSpPr>
-        <p:spPr>
-          <a:xfrm>
-            <a:off x="6217920" y="1719072"/>
+          <p:cNvPr id="7" name="Text 5"/>
+          <p:cNvSpPr/>
+          <p:nvPr/>
+        </p:nvSpPr>
+        <p:spPr>
+          <a:xfrm>
+            <a:off x="822960" y="2103120"/>
+            <a:ext cx="3200400" cy="822960"/>
+          </a:xfrm>
+          <a:prstGeom prst="rect">
+            <a:avLst/>
+          </a:prstGeom>
+          <a:noFill/>
+          <a:ln/>
+        </p:spPr>
+        <p:txBody>
+          <a:bodyPr wrap="square" lIns="0" tIns="0" rIns="0" bIns="0" rtlCol="0" anchor="ctr"/>
+          <a:lstStyle/>
+          <a:p>
+            <a:pPr indent="0" marL="0">
+              <a:buNone/>
+            </a:pPr>
+            <a:r>
+              <a:rPr lang="en-US" sz="1500" b="1" dirty="0">
+                <a:solidFill>
+                  <a:srgbClr val="155E56"/>
+                </a:solidFill>
+                <a:latin typeface="Arial" pitchFamily="34" charset="0"/>
+                <a:ea typeface="Arial" pitchFamily="34" charset="-122"/>
+                <a:cs typeface="Arial" pitchFamily="34" charset="-120"/>
+              </a:rPr>
+              <a:t>O que a IA faz</a:t>
+            </a:r>
+            <a:endParaRPr lang="en-US" sz="1500" dirty="0"/>
+          </a:p>
+        </p:txBody>
+      </p:sp>
+      <p:sp>
+        <p:nvSpPr>
+          <p:cNvPr id="8" name="Text 6"/>
+          <p:cNvSpPr/>
+          <p:nvPr/>
+        </p:nvSpPr>
+        <p:spPr>
+          <a:xfrm>
+            <a:off x="4206240" y="2103120"/>
+            <a:ext cx="7589520" cy="822960"/>
+          </a:xfrm>
+          <a:prstGeom prst="rect">
+            <a:avLst/>
+          </a:prstGeom>
+          <a:noFill/>
+          <a:ln/>
+        </p:spPr>
+        <p:txBody>
+          <a:bodyPr wrap="square" lIns="0" tIns="0" rIns="0" bIns="0" rtlCol="0" anchor="ctr"/>
+          <a:lstStyle/>
+          <a:p>
+            <a:pPr indent="0" marL="0">
+              <a:buNone/>
+            </a:pPr>
+            <a:r>
+              <a:rPr lang="en-US" sz="1300" dirty="0">
+                <a:solidFill>
+                  <a:srgbClr val="18211F"/>
+                </a:solidFill>
+                <a:latin typeface="Arial" pitchFamily="34" charset="0"/>
+                <a:ea typeface="Arial" pitchFamily="34" charset="-122"/>
+                <a:cs typeface="Arial" pitchFamily="34" charset="-120"/>
+              </a:rPr>
+              <a:t>Estrutura o raciocínio clínico: organiza o caso, sugere hipóteses, lista condutas, sinaliza o que precisa ser verificado antes de decidir.</a:t>
+            </a:r>
+            <a:endParaRPr lang="en-US" sz="1300" dirty="0"/>
+          </a:p>
+        </p:txBody>
+      </p:sp>
+      <p:sp>
+        <p:nvSpPr>
+          <p:cNvPr id="9" name="Shape 7"/>
+          <p:cNvSpPr/>
+          <p:nvPr/>
+        </p:nvSpPr>
+        <p:spPr>
+          <a:xfrm>
+            <a:off x="548640" y="3118104"/>
             <a:ext cx="128016" cy="128016"/>
           </a:xfrm>
           <a:prstGeom prst="rect">
             <a:avLst/>
           </a:prstGeom>
           <a:solidFill>
-            <a:srgbClr val="DC2626"/>
+            <a:srgbClr val="155E56"/>
           </a:solidFill>
           <a:ln w="12700">
             <a:solidFill>
-              <a:srgbClr val="DC2626"/>
+              <a:srgbClr val="155E56"/>
             </a:solidFill>
             <a:prstDash val="solid"/>
           </a:ln>
@@ -2480,63 +3533,102 @@
       </p:sp>
       <p:sp>
         <p:nvSpPr>
-          <p:cNvPr id="8" name="Text 6"/>
-          <p:cNvSpPr/>
-          <p:nvPr/>
-        </p:nvSpPr>
-        <p:spPr>
-          <a:xfrm>
-            <a:off x="6492240" y="1645920"/>
-            <a:ext cx="5029200" cy="731520"/>
-          </a:xfrm>
-          <a:prstGeom prst="rect">
-            <a:avLst/>
-          </a:prstGeom>
-          <a:noFill/>
-          <a:ln/>
-        </p:spPr>
-        <p:txBody>
-          <a:bodyPr wrap="square" lIns="0" tIns="0" rIns="0" bIns="0" rtlCol="0" anchor="ctr"/>
-          <a:lstStyle/>
-          <a:p>
-            <a:pPr indent="0" marL="0">
-              <a:buNone/>
-            </a:pPr>
-            <a:r>
-              <a:rPr lang="en-US" sz="1600" b="1" dirty="0">
-                <a:solidFill>
-                  <a:srgbClr val="1A3C34"/>
-                </a:solidFill>
-                <a:latin typeface="Arial" pitchFamily="34" charset="0"/>
-                <a:ea typeface="Arial" pitchFamily="34" charset="-122"/>
-                <a:cs typeface="Arial" pitchFamily="34" charset="-120"/>
-              </a:rPr>
-              <a:t>Não substitui avaliação clínica presencial</a:t>
-            </a:r>
-            <a:endParaRPr lang="en-US" sz="1600" dirty="0"/>
-          </a:p>
-        </p:txBody>
-      </p:sp>
-      <p:sp>
-        <p:nvSpPr>
-          <p:cNvPr id="9" name="Shape 7"/>
-          <p:cNvSpPr/>
-          <p:nvPr/>
-        </p:nvSpPr>
-        <p:spPr>
-          <a:xfrm>
-            <a:off x="548640" y="3090672"/>
+          <p:cNvPr id="10" name="Text 8"/>
+          <p:cNvSpPr/>
+          <p:nvPr/>
+        </p:nvSpPr>
+        <p:spPr>
+          <a:xfrm>
+            <a:off x="822960" y="3063240"/>
+            <a:ext cx="3200400" cy="822960"/>
+          </a:xfrm>
+          <a:prstGeom prst="rect">
+            <a:avLst/>
+          </a:prstGeom>
+          <a:noFill/>
+          <a:ln/>
+        </p:spPr>
+        <p:txBody>
+          <a:bodyPr wrap="square" lIns="0" tIns="0" rIns="0" bIns="0" rtlCol="0" anchor="ctr"/>
+          <a:lstStyle/>
+          <a:p>
+            <a:pPr indent="0" marL="0">
+              <a:buNone/>
+            </a:pPr>
+            <a:r>
+              <a:rPr lang="en-US" sz="1500" b="1" dirty="0">
+                <a:solidFill>
+                  <a:srgbClr val="155E56"/>
+                </a:solidFill>
+                <a:latin typeface="Arial" pitchFamily="34" charset="0"/>
+                <a:ea typeface="Arial" pitchFamily="34" charset="-122"/>
+                <a:cs typeface="Arial" pitchFamily="34" charset="-120"/>
+              </a:rPr>
+              <a:t>O que a IA não faz</a:t>
+            </a:r>
+            <a:endParaRPr lang="en-US" sz="1500" dirty="0"/>
+          </a:p>
+        </p:txBody>
+      </p:sp>
+      <p:sp>
+        <p:nvSpPr>
+          <p:cNvPr id="11" name="Text 9"/>
+          <p:cNvSpPr/>
+          <p:nvPr/>
+        </p:nvSpPr>
+        <p:spPr>
+          <a:xfrm>
+            <a:off x="4206240" y="3063240"/>
+            <a:ext cx="7589520" cy="822960"/>
+          </a:xfrm>
+          <a:prstGeom prst="rect">
+            <a:avLst/>
+          </a:prstGeom>
+          <a:noFill/>
+          <a:ln/>
+        </p:spPr>
+        <p:txBody>
+          <a:bodyPr wrap="square" lIns="0" tIns="0" rIns="0" bIns="0" rtlCol="0" anchor="ctr"/>
+          <a:lstStyle/>
+          <a:p>
+            <a:pPr indent="0" marL="0">
+              <a:buNone/>
+            </a:pPr>
+            <a:r>
+              <a:rPr lang="en-US" sz="1300" dirty="0">
+                <a:solidFill>
+                  <a:srgbClr val="18211F"/>
+                </a:solidFill>
+                <a:latin typeface="Arial" pitchFamily="34" charset="0"/>
+                <a:ea typeface="Arial" pitchFamily="34" charset="-122"/>
+                <a:cs typeface="Arial" pitchFamily="34" charset="-120"/>
+              </a:rPr>
+              <a:t>Não diagnostica. Não prescreve autonomamente. Não substitui o exame físico, o julgamento clínico ou a relação médico-paciente.</a:t>
+            </a:r>
+            <a:endParaRPr lang="en-US" sz="1300" dirty="0"/>
+          </a:p>
+        </p:txBody>
+      </p:sp>
+      <p:sp>
+        <p:nvSpPr>
+          <p:cNvPr id="12" name="Shape 10"/>
+          <p:cNvSpPr/>
+          <p:nvPr/>
+        </p:nvSpPr>
+        <p:spPr>
+          <a:xfrm>
+            <a:off x="548640" y="4078224"/>
             <a:ext cx="128016" cy="128016"/>
           </a:xfrm>
           <a:prstGeom prst="rect">
             <a:avLst/>
           </a:prstGeom>
           <a:solidFill>
-            <a:srgbClr val="DC2626"/>
+            <a:srgbClr val="155E56"/>
           </a:solidFill>
           <a:ln w="12700">
             <a:solidFill>
-              <a:srgbClr val="DC2626"/>
+              <a:srgbClr val="155E56"/>
             </a:solidFill>
             <a:prstDash val="solid"/>
           </a:ln>
@@ -2544,63 +3636,102 @@
       </p:sp>
       <p:sp>
         <p:nvSpPr>
-          <p:cNvPr id="10" name="Text 8"/>
-          <p:cNvSpPr/>
-          <p:nvPr/>
-        </p:nvSpPr>
-        <p:spPr>
-          <a:xfrm>
-            <a:off x="822960" y="3017520"/>
-            <a:ext cx="5029200" cy="731520"/>
-          </a:xfrm>
-          <a:prstGeom prst="rect">
-            <a:avLst/>
-          </a:prstGeom>
-          <a:noFill/>
-          <a:ln/>
-        </p:spPr>
-        <p:txBody>
-          <a:bodyPr wrap="square" lIns="0" tIns="0" rIns="0" bIns="0" rtlCol="0" anchor="ctr"/>
-          <a:lstStyle/>
-          <a:p>
-            <a:pPr indent="0" marL="0">
-              <a:buNone/>
-            </a:pPr>
-            <a:r>
-              <a:rPr lang="en-US" sz="1600" b="1" dirty="0">
-                <a:solidFill>
-                  <a:srgbClr val="1A3C34"/>
-                </a:solidFill>
-                <a:latin typeface="Arial" pitchFamily="34" charset="0"/>
-                <a:ea typeface="Arial" pitchFamily="34" charset="-122"/>
-                <a:cs typeface="Arial" pitchFamily="34" charset="-120"/>
-              </a:rPr>
-              <a:t>Não usa dados de pacientes para treinamento</a:t>
-            </a:r>
-            <a:endParaRPr lang="en-US" sz="1600" dirty="0"/>
-          </a:p>
-        </p:txBody>
-      </p:sp>
-      <p:sp>
-        <p:nvSpPr>
-          <p:cNvPr id="11" name="Shape 9"/>
-          <p:cNvSpPr/>
-          <p:nvPr/>
-        </p:nvSpPr>
-        <p:spPr>
-          <a:xfrm>
-            <a:off x="6217920" y="3090672"/>
+          <p:cNvPr id="13" name="Text 11"/>
+          <p:cNvSpPr/>
+          <p:nvPr/>
+        </p:nvSpPr>
+        <p:spPr>
+          <a:xfrm>
+            <a:off x="822960" y="4023360"/>
+            <a:ext cx="3200400" cy="822960"/>
+          </a:xfrm>
+          <a:prstGeom prst="rect">
+            <a:avLst/>
+          </a:prstGeom>
+          <a:noFill/>
+          <a:ln/>
+        </p:spPr>
+        <p:txBody>
+          <a:bodyPr wrap="square" lIns="0" tIns="0" rIns="0" bIns="0" rtlCol="0" anchor="ctr"/>
+          <a:lstStyle/>
+          <a:p>
+            <a:pPr indent="0" marL="0">
+              <a:buNone/>
+            </a:pPr>
+            <a:r>
+              <a:rPr lang="en-US" sz="1500" b="1" dirty="0">
+                <a:solidFill>
+                  <a:srgbClr val="155E56"/>
+                </a:solidFill>
+                <a:latin typeface="Arial" pitchFamily="34" charset="0"/>
+                <a:ea typeface="Arial" pitchFamily="34" charset="-122"/>
+                <a:cs typeface="Arial" pitchFamily="34" charset="-120"/>
+              </a:rPr>
+              <a:t>O que o médico faz</a:t>
+            </a:r>
+            <a:endParaRPr lang="en-US" sz="1500" dirty="0"/>
+          </a:p>
+        </p:txBody>
+      </p:sp>
+      <p:sp>
+        <p:nvSpPr>
+          <p:cNvPr id="14" name="Text 12"/>
+          <p:cNvSpPr/>
+          <p:nvPr/>
+        </p:nvSpPr>
+        <p:spPr>
+          <a:xfrm>
+            <a:off x="4206240" y="4023360"/>
+            <a:ext cx="7589520" cy="822960"/>
+          </a:xfrm>
+          <a:prstGeom prst="rect">
+            <a:avLst/>
+          </a:prstGeom>
+          <a:noFill/>
+          <a:ln/>
+        </p:spPr>
+        <p:txBody>
+          <a:bodyPr wrap="square" lIns="0" tIns="0" rIns="0" bIns="0" rtlCol="0" anchor="ctr"/>
+          <a:lstStyle/>
+          <a:p>
+            <a:pPr indent="0" marL="0">
+              <a:buNone/>
+            </a:pPr>
+            <a:r>
+              <a:rPr lang="en-US" sz="1300" dirty="0">
+                <a:solidFill>
+                  <a:srgbClr val="18211F"/>
+                </a:solidFill>
+                <a:latin typeface="Arial" pitchFamily="34" charset="0"/>
+                <a:ea typeface="Arial" pitchFamily="34" charset="-122"/>
+                <a:cs typeface="Arial" pitchFamily="34" charset="-120"/>
+              </a:rPr>
+              <a:t>Decide. A ferramenta apresenta o raciocínio documentado; o profissional avalia, valida, corrige e assina a conduta.</a:t>
+            </a:r>
+            <a:endParaRPr lang="en-US" sz="1300" dirty="0"/>
+          </a:p>
+        </p:txBody>
+      </p:sp>
+      <p:sp>
+        <p:nvSpPr>
+          <p:cNvPr id="15" name="Shape 13"/>
+          <p:cNvSpPr/>
+          <p:nvPr/>
+        </p:nvSpPr>
+        <p:spPr>
+          <a:xfrm>
+            <a:off x="548640" y="5038344"/>
             <a:ext cx="128016" cy="128016"/>
           </a:xfrm>
           <a:prstGeom prst="rect">
             <a:avLst/>
           </a:prstGeom>
           <a:solidFill>
-            <a:srgbClr val="DC2626"/>
+            <a:srgbClr val="D97B1E"/>
           </a:solidFill>
           <a:ln w="12700">
             <a:solidFill>
-              <a:srgbClr val="DC2626"/>
+              <a:srgbClr val="D97B1E"/>
             </a:solidFill>
             <a:prstDash val="solid"/>
           </a:ln>
@@ -2608,117 +3739,53 @@
       </p:sp>
       <p:sp>
         <p:nvSpPr>
-          <p:cNvPr id="12" name="Text 10"/>
-          <p:cNvSpPr/>
-          <p:nvPr/>
-        </p:nvSpPr>
-        <p:spPr>
-          <a:xfrm>
-            <a:off x="6492240" y="3017520"/>
-            <a:ext cx="5029200" cy="731520"/>
-          </a:xfrm>
-          <a:prstGeom prst="rect">
-            <a:avLst/>
-          </a:prstGeom>
-          <a:noFill/>
-          <a:ln/>
-        </p:spPr>
-        <p:txBody>
-          <a:bodyPr wrap="square" lIns="0" tIns="0" rIns="0" bIns="0" rtlCol="0" anchor="ctr"/>
-          <a:lstStyle/>
-          <a:p>
-            <a:pPr indent="0" marL="0">
-              <a:buNone/>
-            </a:pPr>
-            <a:r>
-              <a:rPr lang="en-US" sz="1600" b="1" dirty="0">
-                <a:solidFill>
-                  <a:srgbClr val="1A3C34"/>
-                </a:solidFill>
-                <a:latin typeface="Arial" pitchFamily="34" charset="0"/>
-                <a:ea typeface="Arial" pitchFamily="34" charset="-122"/>
-                <a:cs typeface="Arial" pitchFamily="34" charset="-120"/>
-              </a:rPr>
-              <a:t>Não responde pacientes diretamente — é para uso profissional</a:t>
-            </a:r>
-            <a:endParaRPr lang="en-US" sz="1600" dirty="0"/>
-          </a:p>
-        </p:txBody>
-      </p:sp>
-      <p:sp>
-        <p:nvSpPr>
-          <p:cNvPr id="13" name="Shape 11"/>
-          <p:cNvSpPr/>
-          <p:nvPr/>
-        </p:nvSpPr>
-        <p:spPr>
-          <a:xfrm>
-            <a:off x="0" y="4572000"/>
-            <a:ext cx="12188952" cy="914400"/>
-          </a:xfrm>
-          <a:prstGeom prst="rect">
-            <a:avLst/>
-          </a:prstGeom>
-          <a:solidFill>
-            <a:srgbClr val="EAF2F0"/>
-          </a:solidFill>
-          <a:ln w="12700">
-            <a:solidFill>
-              <a:srgbClr val="EAF2F0"/>
-            </a:solidFill>
-            <a:prstDash val="solid"/>
-          </a:ln>
-        </p:spPr>
-      </p:sp>
-      <p:sp>
-        <p:nvSpPr>
-          <p:cNvPr id="14" name="Text 12"/>
-          <p:cNvSpPr/>
-          <p:nvPr/>
-        </p:nvSpPr>
-        <p:spPr>
-          <a:xfrm>
-            <a:off x="548640" y="4572000"/>
-            <a:ext cx="11091672" cy="1097280"/>
-          </a:xfrm>
-          <a:prstGeom prst="rect">
-            <a:avLst/>
-          </a:prstGeom>
-          <a:noFill/>
-          <a:ln/>
-        </p:spPr>
-        <p:txBody>
-          <a:bodyPr wrap="square" lIns="0" tIns="0" rIns="0" bIns="0" rtlCol="0" anchor="ctr"/>
-          <a:lstStyle/>
-          <a:p>
-            <a:pPr indent="0" marL="0">
-              <a:buNone/>
-            </a:pPr>
-            <a:r>
-              <a:rPr lang="en-US" sz="1600" i="1" dirty="0">
+          <p:cNvPr id="16" name="Text 14"/>
+          <p:cNvSpPr/>
+          <p:nvPr/>
+        </p:nvSpPr>
+        <p:spPr>
+          <a:xfrm>
+            <a:off x="822960" y="4983480"/>
+            <a:ext cx="3200400" cy="822960"/>
+          </a:xfrm>
+          <a:prstGeom prst="rect">
+            <a:avLst/>
+          </a:prstGeom>
+          <a:noFill/>
+          <a:ln/>
+        </p:spPr>
+        <p:txBody>
+          <a:bodyPr wrap="square" lIns="0" tIns="0" rIns="0" bIns="0" rtlCol="0" anchor="ctr"/>
+          <a:lstStyle/>
+          <a:p>
+            <a:pPr indent="0" marL="0">
+              <a:buNone/>
+            </a:pPr>
+            <a:r>
+              <a:rPr lang="en-US" sz="1500" b="1" dirty="0">
                 <a:solidFill>
                   <a:srgbClr val="155E56"/>
                 </a:solidFill>
-                <a:latin typeface="Georgia" pitchFamily="34" charset="0"/>
-                <a:ea typeface="Georgia" pitchFamily="34" charset="-122"/>
-                <a:cs typeface="Georgia" pitchFamily="34" charset="-120"/>
-              </a:rPr>
-              <a:t>O uso como ferramenta de apoio à decisão clínica é permitido e está alinhado com as discussões do CFM sobre uso responsável de tecnologia.</a:t>
-            </a:r>
-            <a:endParaRPr lang="en-US" sz="1600" dirty="0"/>
-          </a:p>
-        </p:txBody>
-      </p:sp>
-      <p:sp>
-        <p:nvSpPr>
-          <p:cNvPr id="15" name="Text 13"/>
-          <p:cNvSpPr/>
-          <p:nvPr/>
-        </p:nvSpPr>
-        <p:spPr>
-          <a:xfrm>
-            <a:off x="548640" y="5669280"/>
-            <a:ext cx="11091672" cy="457200"/>
+                <a:latin typeface="Arial" pitchFamily="34" charset="0"/>
+                <a:ea typeface="Arial" pitchFamily="34" charset="-122"/>
+                <a:cs typeface="Arial" pitchFamily="34" charset="-120"/>
+              </a:rPr>
+              <a:t>O que avaliamos</a:t>
+            </a:r>
+            <a:endParaRPr lang="en-US" sz="1500" dirty="0"/>
+          </a:p>
+        </p:txBody>
+      </p:sp>
+      <p:sp>
+        <p:nvSpPr>
+          <p:cNvPr id="17" name="Text 15"/>
+          <p:cNvSpPr/>
+          <p:nvPr/>
+        </p:nvSpPr>
+        <p:spPr>
+          <a:xfrm>
+            <a:off x="4206240" y="4983480"/>
+            <a:ext cx="7589520" cy="822960"/>
           </a:xfrm>
           <a:prstGeom prst="rect">
             <a:avLst/>
@@ -2736,13 +3803,13 @@
             <a:r>
               <a:rPr lang="en-US" sz="1300" dirty="0">
                 <a:solidFill>
-                  <a:srgbClr val="5F6F6C"/>
-                </a:solidFill>
-                <a:latin typeface="Arial" pitchFamily="34" charset="0"/>
-                <a:ea typeface="Arial" pitchFamily="34" charset="-122"/>
-                <a:cs typeface="Arial" pitchFamily="34" charset="-120"/>
-              </a:rPr>
-              <a:t>Uso regulamentado: CFM reconhece o uso de ferramentas de IA como apoio, desde que o médico mantenha a decisão final e a responsabilidade profissional.</a:t>
+                  <a:srgbClr val="18211F"/>
+                </a:solidFill>
+                <a:latin typeface="Arial" pitchFamily="34" charset="0"/>
+                <a:ea typeface="Arial" pitchFamily="34" charset="-122"/>
+                <a:cs typeface="Arial" pitchFamily="34" charset="-120"/>
+              </a:rPr>
+              <a:t>Se o modelo: (1) responde corretamente, (2) se abstém quando não sabe, (3) nunca recomenda algo perigoso, (4) admite incerteza.</a:t>
             </a:r>
             <a:endParaRPr lang="en-US" sz="1300" dirty="0"/>
           </a:p>
@@ -2891,7 +3958,7 @@
                 <a:ea typeface="Georgia" pitchFamily="34" charset="-122"/>
                 <a:cs typeface="Georgia" pitchFamily="34" charset="-120"/>
               </a:rPr>
-              <a:t>Metodologia do Teste Cego</a:t>
+              <a:t>O que é a ferramenta</a:t>
             </a:r>
             <a:endParaRPr lang="en-US" sz="3000" dirty="0"/>
           </a:p>
@@ -2905,63 +3972,24 @@
         </p:nvSpPr>
         <p:spPr>
           <a:xfrm>
-            <a:off x="548640" y="1554480"/>
-            <a:ext cx="2651760" cy="914400"/>
-          </a:xfrm>
-          <a:prstGeom prst="rect">
-            <a:avLst/>
-          </a:prstGeom>
-          <a:noFill/>
-          <a:ln/>
-        </p:spPr>
-        <p:txBody>
-          <a:bodyPr wrap="square" lIns="0" tIns="0" rIns="0" bIns="0" rtlCol="0" anchor="ctr"/>
-          <a:lstStyle/>
-          <a:p>
-            <a:pPr indent="0" marL="0">
-              <a:buNone/>
-            </a:pPr>
-            <a:r>
-              <a:rPr lang="en-US" sz="4800" b="1" dirty="0">
-                <a:solidFill>
-                  <a:srgbClr val="155E56"/>
-                </a:solidFill>
-                <a:latin typeface="Georgia" pitchFamily="34" charset="0"/>
-                <a:ea typeface="Georgia" pitchFamily="34" charset="-122"/>
-                <a:cs typeface="Georgia" pitchFamily="34" charset="-120"/>
-              </a:rPr>
-              <a:t>200</a:t>
-            </a:r>
-            <a:endParaRPr lang="en-US" sz="4800" dirty="0"/>
-          </a:p>
-        </p:txBody>
-      </p:sp>
-      <p:sp>
-        <p:nvSpPr>
-          <p:cNvPr id="6" name="Text 4"/>
-          <p:cNvSpPr/>
-          <p:nvPr/>
-        </p:nvSpPr>
-        <p:spPr>
-          <a:xfrm>
-            <a:off x="548640" y="2468880"/>
-            <a:ext cx="2651760" cy="457200"/>
-          </a:xfrm>
-          <a:prstGeom prst="rect">
-            <a:avLst/>
-          </a:prstGeom>
-          <a:noFill/>
-          <a:ln/>
-        </p:spPr>
-        <p:txBody>
-          <a:bodyPr wrap="square" lIns="0" tIns="0" rIns="0" bIns="0" rtlCol="0" anchor="ctr"/>
-          <a:lstStyle/>
-          <a:p>
-            <a:pPr indent="0" marL="0">
-              <a:buNone/>
-            </a:pPr>
-            <a:r>
-              <a:rPr lang="en-US" sz="1300" dirty="0">
+            <a:off x="548640" y="1097280"/>
+            <a:ext cx="11091672" cy="457200"/>
+          </a:xfrm>
+          <a:prstGeom prst="rect">
+            <a:avLst/>
+          </a:prstGeom>
+          <a:noFill/>
+          <a:ln/>
+        </p:spPr>
+        <p:txBody>
+          <a:bodyPr wrap="square" lIns="0" tIns="0" rIns="0" bIns="0" rtlCol="0" anchor="ctr"/>
+          <a:lstStyle/>
+          <a:p>
+            <a:pPr indent="0" marL="0">
+              <a:buNone/>
+            </a:pPr>
+            <a:r>
+              <a:rPr lang="en-US" sz="1500" dirty="0">
                 <a:solidFill>
                   <a:srgbClr val="5F6F6C"/>
                 </a:solidFill>
@@ -2969,264 +3997,32 @@
                 <a:ea typeface="Arial" pitchFamily="34" charset="-122"/>
                 <a:cs typeface="Arial" pitchFamily="34" charset="-120"/>
               </a:rPr>
-              <a:t>casos clínicos</a:t>
-            </a:r>
-            <a:endParaRPr lang="en-US" sz="1300" dirty="0"/>
-          </a:p>
-        </p:txBody>
-      </p:sp>
-      <p:sp>
-        <p:nvSpPr>
-          <p:cNvPr id="7" name="Text 5"/>
-          <p:cNvSpPr/>
-          <p:nvPr/>
-        </p:nvSpPr>
-        <p:spPr>
-          <a:xfrm>
-            <a:off x="3429000" y="1554480"/>
-            <a:ext cx="2651760" cy="914400"/>
-          </a:xfrm>
-          <a:prstGeom prst="rect">
-            <a:avLst/>
-          </a:prstGeom>
-          <a:noFill/>
-          <a:ln/>
-        </p:spPr>
-        <p:txBody>
-          <a:bodyPr wrap="square" lIns="0" tIns="0" rIns="0" bIns="0" rtlCol="0" anchor="ctr"/>
-          <a:lstStyle/>
-          <a:p>
-            <a:pPr indent="0" marL="0">
-              <a:buNone/>
-            </a:pPr>
-            <a:r>
-              <a:rPr lang="en-US" sz="4800" b="1" dirty="0">
-                <a:solidFill>
-                  <a:srgbClr val="155E56"/>
-                </a:solidFill>
-                <a:latin typeface="Georgia" pitchFamily="34" charset="0"/>
-                <a:ea typeface="Georgia" pitchFamily="34" charset="-122"/>
-                <a:cs typeface="Georgia" pitchFamily="34" charset="-120"/>
-              </a:rPr>
-              <a:t>9</a:t>
-            </a:r>
-            <a:endParaRPr lang="en-US" sz="4800" dirty="0"/>
-          </a:p>
-        </p:txBody>
-      </p:sp>
-      <p:sp>
-        <p:nvSpPr>
-          <p:cNvPr id="8" name="Text 6"/>
-          <p:cNvSpPr/>
-          <p:nvPr/>
-        </p:nvSpPr>
-        <p:spPr>
-          <a:xfrm>
-            <a:off x="3429000" y="2468880"/>
-            <a:ext cx="2651760" cy="457200"/>
-          </a:xfrm>
-          <a:prstGeom prst="rect">
-            <a:avLst/>
-          </a:prstGeom>
-          <a:noFill/>
-          <a:ln/>
-        </p:spPr>
-        <p:txBody>
-          <a:bodyPr wrap="square" lIns="0" tIns="0" rIns="0" bIns="0" rtlCol="0" anchor="ctr"/>
-          <a:lstStyle/>
-          <a:p>
-            <a:pPr indent="0" marL="0">
-              <a:buNone/>
-            </a:pPr>
-            <a:r>
-              <a:rPr lang="en-US" sz="1300" dirty="0">
-                <a:solidFill>
-                  <a:srgbClr val="5F6F6C"/>
-                </a:solidFill>
-                <a:latin typeface="Arial" pitchFamily="34" charset="0"/>
-                <a:ea typeface="Arial" pitchFamily="34" charset="-122"/>
-                <a:cs typeface="Arial" pitchFamily="34" charset="-120"/>
-              </a:rPr>
-              <a:t>modelos (cegos: A-I)</a:t>
-            </a:r>
-            <a:endParaRPr lang="en-US" sz="1300" dirty="0"/>
-          </a:p>
-        </p:txBody>
-      </p:sp>
-      <p:sp>
-        <p:nvSpPr>
-          <p:cNvPr id="9" name="Text 7"/>
-          <p:cNvSpPr/>
-          <p:nvPr/>
-        </p:nvSpPr>
-        <p:spPr>
-          <a:xfrm>
-            <a:off x="6309360" y="1554480"/>
-            <a:ext cx="2651760" cy="914400"/>
-          </a:xfrm>
-          <a:prstGeom prst="rect">
-            <a:avLst/>
-          </a:prstGeom>
-          <a:noFill/>
-          <a:ln/>
-        </p:spPr>
-        <p:txBody>
-          <a:bodyPr wrap="square" lIns="0" tIns="0" rIns="0" bIns="0" rtlCol="0" anchor="ctr"/>
-          <a:lstStyle/>
-          <a:p>
-            <a:pPr indent="0" marL="0">
-              <a:buNone/>
-            </a:pPr>
-            <a:r>
-              <a:rPr lang="en-US" sz="4800" b="1" dirty="0">
-                <a:solidFill>
-                  <a:srgbClr val="155E56"/>
-                </a:solidFill>
-                <a:latin typeface="Georgia" pitchFamily="34" charset="0"/>
-                <a:ea typeface="Georgia" pitchFamily="34" charset="-122"/>
-                <a:cs typeface="Georgia" pitchFamily="34" charset="-120"/>
-              </a:rPr>
-              <a:t>23</a:t>
-            </a:r>
-            <a:endParaRPr lang="en-US" sz="4800" dirty="0"/>
-          </a:p>
-        </p:txBody>
-      </p:sp>
-      <p:sp>
-        <p:nvSpPr>
-          <p:cNvPr id="10" name="Text 8"/>
-          <p:cNvSpPr/>
-          <p:nvPr/>
-        </p:nvSpPr>
-        <p:spPr>
-          <a:xfrm>
-            <a:off x="6309360" y="2468880"/>
-            <a:ext cx="2651760" cy="457200"/>
-          </a:xfrm>
-          <a:prstGeom prst="rect">
-            <a:avLst/>
-          </a:prstGeom>
-          <a:noFill/>
-          <a:ln/>
-        </p:spPr>
-        <p:txBody>
-          <a:bodyPr wrap="square" lIns="0" tIns="0" rIns="0" bIns="0" rtlCol="0" anchor="ctr"/>
-          <a:lstStyle/>
-          <a:p>
-            <a:pPr indent="0" marL="0">
-              <a:buNone/>
-            </a:pPr>
-            <a:r>
-              <a:rPr lang="en-US" sz="1300" dirty="0">
-                <a:solidFill>
-                  <a:srgbClr val="5F6F6C"/>
-                </a:solidFill>
-                <a:latin typeface="Arial" pitchFamily="34" charset="0"/>
-                <a:ea typeface="Arial" pitchFamily="34" charset="-122"/>
-                <a:cs typeface="Arial" pitchFamily="34" charset="-120"/>
-              </a:rPr>
-              <a:t>especialidades</a:t>
-            </a:r>
-            <a:endParaRPr lang="en-US" sz="1300" dirty="0"/>
-          </a:p>
-        </p:txBody>
-      </p:sp>
-      <p:sp>
-        <p:nvSpPr>
-          <p:cNvPr id="11" name="Text 9"/>
-          <p:cNvSpPr/>
-          <p:nvPr/>
-        </p:nvSpPr>
-        <p:spPr>
-          <a:xfrm>
-            <a:off x="9189720" y="1554480"/>
-            <a:ext cx="2651760" cy="914400"/>
-          </a:xfrm>
-          <a:prstGeom prst="rect">
-            <a:avLst/>
-          </a:prstGeom>
-          <a:noFill/>
-          <a:ln/>
-        </p:spPr>
-        <p:txBody>
-          <a:bodyPr wrap="square" lIns="0" tIns="0" rIns="0" bIns="0" rtlCol="0" anchor="ctr"/>
-          <a:lstStyle/>
-          <a:p>
-            <a:pPr indent="0" marL="0">
-              <a:buNone/>
-            </a:pPr>
-            <a:r>
-              <a:rPr lang="en-US" sz="4800" b="1" dirty="0">
-                <a:solidFill>
-                  <a:srgbClr val="D97B1E"/>
-                </a:solidFill>
-                <a:latin typeface="Georgia" pitchFamily="34" charset="0"/>
-                <a:ea typeface="Georgia" pitchFamily="34" charset="-122"/>
-                <a:cs typeface="Georgia" pitchFamily="34" charset="-120"/>
-              </a:rPr>
-              <a:t>1.800</a:t>
-            </a:r>
-            <a:endParaRPr lang="en-US" sz="4800" dirty="0"/>
-          </a:p>
-        </p:txBody>
-      </p:sp>
-      <p:sp>
-        <p:nvSpPr>
-          <p:cNvPr id="12" name="Text 10"/>
-          <p:cNvSpPr/>
-          <p:nvPr/>
-        </p:nvSpPr>
-        <p:spPr>
-          <a:xfrm>
-            <a:off x="9189720" y="2468880"/>
-            <a:ext cx="2651760" cy="457200"/>
-          </a:xfrm>
-          <a:prstGeom prst="rect">
-            <a:avLst/>
-          </a:prstGeom>
-          <a:noFill/>
-          <a:ln/>
-        </p:spPr>
-        <p:txBody>
-          <a:bodyPr wrap="square" lIns="0" tIns="0" rIns="0" bIns="0" rtlCol="0" anchor="ctr"/>
-          <a:lstStyle/>
-          <a:p>
-            <a:pPr indent="0" marL="0">
-              <a:buNone/>
-            </a:pPr>
-            <a:r>
-              <a:rPr lang="en-US" sz="1300" dirty="0">
-                <a:solidFill>
-                  <a:srgbClr val="5F6F6C"/>
-                </a:solidFill>
-                <a:latin typeface="Arial" pitchFamily="34" charset="0"/>
-                <a:ea typeface="Arial" pitchFamily="34" charset="-122"/>
-                <a:cs typeface="Arial" pitchFamily="34" charset="-120"/>
-              </a:rPr>
-              <a:t>respostas para revisão</a:t>
-            </a:r>
-            <a:endParaRPr lang="en-US" sz="1300" dirty="0"/>
-          </a:p>
-        </p:txBody>
-      </p:sp>
-      <p:sp>
-        <p:nvSpPr>
-          <p:cNvPr id="13" name="Shape 11"/>
-          <p:cNvSpPr/>
-          <p:nvPr/>
-        </p:nvSpPr>
-        <p:spPr>
-          <a:xfrm>
-            <a:off x="548640" y="3108960"/>
-            <a:ext cx="11091672" cy="0"/>
-          </a:xfrm>
-          <a:prstGeom prst="line">
-            <a:avLst/>
-          </a:prstGeom>
-          <a:noFill/>
-          <a:ln w="9525">
+              <a:t>Apoio à decisão clínica — nunca diagnóstico autônomo</a:t>
+            </a:r>
+            <a:endParaRPr lang="en-US" sz="1500" dirty="0"/>
+          </a:p>
+        </p:txBody>
+      </p:sp>
+      <p:sp>
+        <p:nvSpPr>
+          <p:cNvPr id="6" name="Shape 4"/>
+          <p:cNvSpPr/>
+          <p:nvPr/>
+        </p:nvSpPr>
+        <p:spPr>
+          <a:xfrm>
+            <a:off x="548640" y="1444752"/>
+            <a:ext cx="128016" cy="128016"/>
+          </a:xfrm>
+          <a:prstGeom prst="rect">
+            <a:avLst/>
+          </a:prstGeom>
+          <a:solidFill>
+            <a:srgbClr val="D97B1E"/>
+          </a:solidFill>
+          <a:ln w="12700">
             <a:solidFill>
-              <a:srgbClr val="CFDCD9"/>
+              <a:srgbClr val="D97B1E"/>
             </a:solidFill>
             <a:prstDash val="solid"/>
           </a:ln>
@@ -3234,39 +4030,25 @@
       </p:sp>
       <p:sp>
         <p:nvSpPr>
-          <p:cNvPr id="14" name="Text 12"/>
-          <p:cNvSpPr/>
-          <p:nvPr/>
-        </p:nvSpPr>
-        <p:spPr>
-          <a:xfrm>
-            <a:off x="548640" y="3291840"/>
-            <a:ext cx="11091672" cy="1097280"/>
-          </a:xfrm>
-          <a:prstGeom prst="rect">
-            <a:avLst/>
-          </a:prstGeom>
-          <a:noFill/>
-          <a:ln/>
-        </p:spPr>
-        <p:txBody>
-          <a:bodyPr wrap="square" lIns="0" tIns="0" rIns="0" bIns="0" rtlCol="0" anchor="ctr"/>
-          <a:lstStyle/>
-          <a:p>
-            <a:pPr indent="0" marL="0">
-              <a:buNone/>
-            </a:pPr>
-            <a:r>
-              <a:rPr lang="en-US" sz="1500" b="1" dirty="0">
-                <a:solidFill>
-                  <a:srgbClr val="155E56"/>
-                </a:solidFill>
-                <a:latin typeface="Arial" pitchFamily="34" charset="0"/>
-                <a:ea typeface="Arial" pitchFamily="34" charset="-122"/>
-                <a:cs typeface="Arial" pitchFamily="34" charset="-120"/>
-              </a:rPr>
-              <a:t>Cego: </a:t>
-            </a:r>
+          <p:cNvPr id="7" name="Text 5"/>
+          <p:cNvSpPr/>
+          <p:nvPr/>
+        </p:nvSpPr>
+        <p:spPr>
+          <a:xfrm>
+            <a:off x="868680" y="1371600"/>
+            <a:ext cx="10058400" cy="731520"/>
+          </a:xfrm>
+          <a:prstGeom prst="rect">
+            <a:avLst/>
+          </a:prstGeom>
+          <a:noFill/>
+          <a:ln/>
+        </p:spPr>
+        <p:txBody>
+          <a:bodyPr wrap="square" lIns="0" tIns="0" rIns="0" bIns="0" rtlCol="0" anchor="t"/>
+          <a:lstStyle/>
+          <a:p>
             <a:pPr indent="0" marL="0">
               <a:buNone/>
             </a:pPr>
@@ -3279,7 +4061,263 @@
                 <a:ea typeface="Arial" pitchFamily="34" charset="-122"/>
                 <a:cs typeface="Arial" pitchFamily="34" charset="-120"/>
               </a:rPr>
-              <a:t>você recebe 200 casos com respostas de 9 modelos (Modelo A até Modelo I), sem saber qual modelo gerou cada resposta. Avalia cada resposta. As identidades são reveladas após a revisão completa.</a:t>
+              <a:t>Não substitui o médico. O profissional descreve o caso, a ferramenta estrutura o raciocínio, o médico decide.</a:t>
+            </a:r>
+            <a:endParaRPr lang="en-US" sz="1500" dirty="0"/>
+          </a:p>
+        </p:txBody>
+      </p:sp>
+      <p:sp>
+        <p:nvSpPr>
+          <p:cNvPr id="8" name="Shape 6"/>
+          <p:cNvSpPr/>
+          <p:nvPr/>
+        </p:nvSpPr>
+        <p:spPr>
+          <a:xfrm>
+            <a:off x="548640" y="2313432"/>
+            <a:ext cx="128016" cy="128016"/>
+          </a:xfrm>
+          <a:prstGeom prst="rect">
+            <a:avLst/>
+          </a:prstGeom>
+          <a:solidFill>
+            <a:srgbClr val="D97B1E"/>
+          </a:solidFill>
+          <a:ln w="12700">
+            <a:solidFill>
+              <a:srgbClr val="D97B1E"/>
+            </a:solidFill>
+            <a:prstDash val="solid"/>
+          </a:ln>
+        </p:spPr>
+      </p:sp>
+      <p:sp>
+        <p:nvSpPr>
+          <p:cNvPr id="9" name="Text 7"/>
+          <p:cNvSpPr/>
+          <p:nvPr/>
+        </p:nvSpPr>
+        <p:spPr>
+          <a:xfrm>
+            <a:off x="868680" y="2240280"/>
+            <a:ext cx="10058400" cy="731520"/>
+          </a:xfrm>
+          <a:prstGeom prst="rect">
+            <a:avLst/>
+          </a:prstGeom>
+          <a:noFill/>
+          <a:ln/>
+        </p:spPr>
+        <p:txBody>
+          <a:bodyPr wrap="square" lIns="0" tIns="0" rIns="0" bIns="0" rtlCol="0" anchor="t"/>
+          <a:lstStyle/>
+          <a:p>
+            <a:pPr indent="0" marL="0">
+              <a:buNone/>
+            </a:pPr>
+            <a:r>
+              <a:rPr lang="en-US" sz="1500" dirty="0">
+                <a:solidFill>
+                  <a:srgbClr val="18211F"/>
+                </a:solidFill>
+                <a:latin typeface="Arial" pitchFamily="34" charset="0"/>
+                <a:ea typeface="Arial" pitchFamily="34" charset="-122"/>
+                <a:cs typeface="Arial" pitchFamily="34" charset="-120"/>
+              </a:rPr>
+              <a:t>Se abstém quando não sabe. Se a evidência é insuficiente, a resposta é 'insufficient' — não um chute.</a:t>
+            </a:r>
+            <a:endParaRPr lang="en-US" sz="1500" dirty="0"/>
+          </a:p>
+        </p:txBody>
+      </p:sp>
+      <p:sp>
+        <p:nvSpPr>
+          <p:cNvPr id="10" name="Shape 8"/>
+          <p:cNvSpPr/>
+          <p:nvPr/>
+        </p:nvSpPr>
+        <p:spPr>
+          <a:xfrm>
+            <a:off x="548640" y="3182112"/>
+            <a:ext cx="128016" cy="128016"/>
+          </a:xfrm>
+          <a:prstGeom prst="rect">
+            <a:avLst/>
+          </a:prstGeom>
+          <a:solidFill>
+            <a:srgbClr val="D97B1E"/>
+          </a:solidFill>
+          <a:ln w="12700">
+            <a:solidFill>
+              <a:srgbClr val="D97B1E"/>
+            </a:solidFill>
+            <a:prstDash val="solid"/>
+          </a:ln>
+        </p:spPr>
+      </p:sp>
+      <p:sp>
+        <p:nvSpPr>
+          <p:cNvPr id="11" name="Text 9"/>
+          <p:cNvSpPr/>
+          <p:nvPr/>
+        </p:nvSpPr>
+        <p:spPr>
+          <a:xfrm>
+            <a:off x="868680" y="3108960"/>
+            <a:ext cx="10058400" cy="731520"/>
+          </a:xfrm>
+          <a:prstGeom prst="rect">
+            <a:avLst/>
+          </a:prstGeom>
+          <a:noFill/>
+          <a:ln/>
+        </p:spPr>
+        <p:txBody>
+          <a:bodyPr wrap="square" lIns="0" tIns="0" rIns="0" bIns="0" rtlCol="0" anchor="t"/>
+          <a:lstStyle/>
+          <a:p>
+            <a:pPr indent="0" marL="0">
+              <a:buNone/>
+            </a:pPr>
+            <a:r>
+              <a:rPr lang="en-US" sz="1500" dirty="0">
+                <a:solidFill>
+                  <a:srgbClr val="18211F"/>
+                </a:solidFill>
+                <a:latin typeface="Arial" pitchFamily="34" charset="0"/>
+                <a:ea typeface="Arial" pitchFamily="34" charset="-122"/>
+                <a:cs typeface="Arial" pitchFamily="34" charset="-120"/>
+              </a:rPr>
+              <a:t>Nunca inventa dose. Quando não tem certeza, diz 'confirmar em bula/protocolo vigente'.</a:t>
+            </a:r>
+            <a:endParaRPr lang="en-US" sz="1500" dirty="0"/>
+          </a:p>
+        </p:txBody>
+      </p:sp>
+      <p:sp>
+        <p:nvSpPr>
+          <p:cNvPr id="12" name="Shape 10"/>
+          <p:cNvSpPr/>
+          <p:nvPr/>
+        </p:nvSpPr>
+        <p:spPr>
+          <a:xfrm>
+            <a:off x="548640" y="4050792"/>
+            <a:ext cx="128016" cy="128016"/>
+          </a:xfrm>
+          <a:prstGeom prst="rect">
+            <a:avLst/>
+          </a:prstGeom>
+          <a:solidFill>
+            <a:srgbClr val="D97B1E"/>
+          </a:solidFill>
+          <a:ln w="12700">
+            <a:solidFill>
+              <a:srgbClr val="D97B1E"/>
+            </a:solidFill>
+            <a:prstDash val="solid"/>
+          </a:ln>
+        </p:spPr>
+      </p:sp>
+      <p:sp>
+        <p:nvSpPr>
+          <p:cNvPr id="13" name="Text 11"/>
+          <p:cNvSpPr/>
+          <p:nvPr/>
+        </p:nvSpPr>
+        <p:spPr>
+          <a:xfrm>
+            <a:off x="868680" y="3977640"/>
+            <a:ext cx="10058400" cy="731520"/>
+          </a:xfrm>
+          <a:prstGeom prst="rect">
+            <a:avLst/>
+          </a:prstGeom>
+          <a:noFill/>
+          <a:ln/>
+        </p:spPr>
+        <p:txBody>
+          <a:bodyPr wrap="square" lIns="0" tIns="0" rIns="0" bIns="0" rtlCol="0" anchor="t"/>
+          <a:lstStyle/>
+          <a:p>
+            <a:pPr indent="0" marL="0">
+              <a:buNone/>
+            </a:pPr>
+            <a:r>
+              <a:rPr lang="en-US" sz="1500" dirty="0">
+                <a:solidFill>
+                  <a:srgbClr val="18211F"/>
+                </a:solidFill>
+                <a:latin typeface="Arial" pitchFamily="34" charset="0"/>
+                <a:ea typeface="Arial" pitchFamily="34" charset="-122"/>
+                <a:cs typeface="Arial" pitchFamily="34" charset="-120"/>
+              </a:rPr>
+              <a:t>É auditável. Cada resposta tem modelo, versão, raciocínio, tokens, tempo e guardrail — tudo registrado.</a:t>
+            </a:r>
+            <a:endParaRPr lang="en-US" sz="1500" dirty="0"/>
+          </a:p>
+        </p:txBody>
+      </p:sp>
+      <p:sp>
+        <p:nvSpPr>
+          <p:cNvPr id="14" name="Shape 12"/>
+          <p:cNvSpPr/>
+          <p:nvPr/>
+        </p:nvSpPr>
+        <p:spPr>
+          <a:xfrm>
+            <a:off x="548640" y="4919472"/>
+            <a:ext cx="128016" cy="128016"/>
+          </a:xfrm>
+          <a:prstGeom prst="rect">
+            <a:avLst/>
+          </a:prstGeom>
+          <a:solidFill>
+            <a:srgbClr val="D97B1E"/>
+          </a:solidFill>
+          <a:ln w="12700">
+            <a:solidFill>
+              <a:srgbClr val="D97B1E"/>
+            </a:solidFill>
+            <a:prstDash val="solid"/>
+          </a:ln>
+        </p:spPr>
+      </p:sp>
+      <p:sp>
+        <p:nvSpPr>
+          <p:cNvPr id="15" name="Text 13"/>
+          <p:cNvSpPr/>
+          <p:nvPr/>
+        </p:nvSpPr>
+        <p:spPr>
+          <a:xfrm>
+            <a:off x="868680" y="4846320"/>
+            <a:ext cx="10058400" cy="731520"/>
+          </a:xfrm>
+          <a:prstGeom prst="rect">
+            <a:avLst/>
+          </a:prstGeom>
+          <a:noFill/>
+          <a:ln/>
+        </p:spPr>
+        <p:txBody>
+          <a:bodyPr wrap="square" lIns="0" tIns="0" rIns="0" bIns="0" rtlCol="0" anchor="t"/>
+          <a:lstStyle/>
+          <a:p>
+            <a:pPr indent="0" marL="0">
+              <a:buNone/>
+            </a:pPr>
+            <a:r>
+              <a:rPr lang="en-US" sz="1500" dirty="0">
+                <a:solidFill>
+                  <a:srgbClr val="18211F"/>
+                </a:solidFill>
+                <a:latin typeface="Arial" pitchFamily="34" charset="0"/>
+                <a:ea typeface="Arial" pitchFamily="34" charset="-122"/>
+                <a:cs typeface="Arial" pitchFamily="34" charset="-120"/>
+              </a:rPr>
+              <a:t>Remove dados pessoais antes de qualquer processamento. Nome, CPF e telefone são removidos em São Paulo.</a:t>
             </a:r>
             <a:endParaRPr lang="en-US" sz="1500" dirty="0"/>
           </a:p>
@@ -3428,6 +4466,1210 @@
                 <a:ea typeface="Georgia" pitchFamily="34" charset="-122"/>
                 <a:cs typeface="Georgia" pitchFamily="34" charset="-120"/>
               </a:rPr>
+              <a:t>O que NÃO é</a:t>
+            </a:r>
+            <a:endParaRPr lang="en-US" sz="3000" dirty="0"/>
+          </a:p>
+        </p:txBody>
+      </p:sp>
+      <p:sp>
+        <p:nvSpPr>
+          <p:cNvPr id="5" name="Shape 3"/>
+          <p:cNvSpPr/>
+          <p:nvPr/>
+        </p:nvSpPr>
+        <p:spPr>
+          <a:xfrm>
+            <a:off x="548640" y="1353312"/>
+            <a:ext cx="128016" cy="128016"/>
+          </a:xfrm>
+          <a:prstGeom prst="rect">
+            <a:avLst/>
+          </a:prstGeom>
+          <a:solidFill>
+            <a:srgbClr val="DC2626"/>
+          </a:solidFill>
+          <a:ln w="12700">
+            <a:solidFill>
+              <a:srgbClr val="DC2626"/>
+            </a:solidFill>
+            <a:prstDash val="solid"/>
+          </a:ln>
+        </p:spPr>
+      </p:sp>
+      <p:sp>
+        <p:nvSpPr>
+          <p:cNvPr id="6" name="Text 4"/>
+          <p:cNvSpPr/>
+          <p:nvPr/>
+        </p:nvSpPr>
+        <p:spPr>
+          <a:xfrm>
+            <a:off x="822960" y="1280160"/>
+            <a:ext cx="5029200" cy="640080"/>
+          </a:xfrm>
+          <a:prstGeom prst="rect">
+            <a:avLst/>
+          </a:prstGeom>
+          <a:noFill/>
+          <a:ln/>
+        </p:spPr>
+        <p:txBody>
+          <a:bodyPr wrap="square" lIns="0" tIns="0" rIns="0" bIns="0" rtlCol="0" anchor="ctr"/>
+          <a:lstStyle/>
+          <a:p>
+            <a:pPr indent="0" marL="0">
+              <a:buNone/>
+            </a:pPr>
+            <a:r>
+              <a:rPr lang="en-US" sz="1700" b="1" dirty="0">
+                <a:solidFill>
+                  <a:srgbClr val="1A3C34"/>
+                </a:solidFill>
+                <a:latin typeface="Arial" pitchFamily="34" charset="0"/>
+                <a:ea typeface="Arial" pitchFamily="34" charset="-122"/>
+                <a:cs typeface="Arial" pitchFamily="34" charset="-120"/>
+              </a:rPr>
+              <a:t>Não é diagnóstico autônomo</a:t>
+            </a:r>
+            <a:endParaRPr lang="en-US" sz="1700" dirty="0"/>
+          </a:p>
+        </p:txBody>
+      </p:sp>
+      <p:sp>
+        <p:nvSpPr>
+          <p:cNvPr id="7" name="Shape 5"/>
+          <p:cNvSpPr/>
+          <p:nvPr/>
+        </p:nvSpPr>
+        <p:spPr>
+          <a:xfrm>
+            <a:off x="6217920" y="1353312"/>
+            <a:ext cx="128016" cy="128016"/>
+          </a:xfrm>
+          <a:prstGeom prst="rect">
+            <a:avLst/>
+          </a:prstGeom>
+          <a:solidFill>
+            <a:srgbClr val="DC2626"/>
+          </a:solidFill>
+          <a:ln w="12700">
+            <a:solidFill>
+              <a:srgbClr val="DC2626"/>
+            </a:solidFill>
+            <a:prstDash val="solid"/>
+          </a:ln>
+        </p:spPr>
+      </p:sp>
+      <p:sp>
+        <p:nvSpPr>
+          <p:cNvPr id="8" name="Text 6"/>
+          <p:cNvSpPr/>
+          <p:nvPr/>
+        </p:nvSpPr>
+        <p:spPr>
+          <a:xfrm>
+            <a:off x="6492240" y="1280160"/>
+            <a:ext cx="5029200" cy="640080"/>
+          </a:xfrm>
+          <a:prstGeom prst="rect">
+            <a:avLst/>
+          </a:prstGeom>
+          <a:noFill/>
+          <a:ln/>
+        </p:spPr>
+        <p:txBody>
+          <a:bodyPr wrap="square" lIns="0" tIns="0" rIns="0" bIns="0" rtlCol="0" anchor="ctr"/>
+          <a:lstStyle/>
+          <a:p>
+            <a:pPr indent="0" marL="0">
+              <a:buNone/>
+            </a:pPr>
+            <a:r>
+              <a:rPr lang="en-US" sz="1700" b="1" dirty="0">
+                <a:solidFill>
+                  <a:srgbClr val="1A3C34"/>
+                </a:solidFill>
+                <a:latin typeface="Arial" pitchFamily="34" charset="0"/>
+                <a:ea typeface="Arial" pitchFamily="34" charset="-122"/>
+                <a:cs typeface="Arial" pitchFamily="34" charset="-120"/>
+              </a:rPr>
+              <a:t>Não substitui avaliação clínica presencial</a:t>
+            </a:r>
+            <a:endParaRPr lang="en-US" sz="1700" dirty="0"/>
+          </a:p>
+        </p:txBody>
+      </p:sp>
+      <p:sp>
+        <p:nvSpPr>
+          <p:cNvPr id="9" name="Shape 7"/>
+          <p:cNvSpPr/>
+          <p:nvPr/>
+        </p:nvSpPr>
+        <p:spPr>
+          <a:xfrm>
+            <a:off x="548640" y="2542032"/>
+            <a:ext cx="128016" cy="128016"/>
+          </a:xfrm>
+          <a:prstGeom prst="rect">
+            <a:avLst/>
+          </a:prstGeom>
+          <a:solidFill>
+            <a:srgbClr val="DC2626"/>
+          </a:solidFill>
+          <a:ln w="12700">
+            <a:solidFill>
+              <a:srgbClr val="DC2626"/>
+            </a:solidFill>
+            <a:prstDash val="solid"/>
+          </a:ln>
+        </p:spPr>
+      </p:sp>
+      <p:sp>
+        <p:nvSpPr>
+          <p:cNvPr id="10" name="Text 8"/>
+          <p:cNvSpPr/>
+          <p:nvPr/>
+        </p:nvSpPr>
+        <p:spPr>
+          <a:xfrm>
+            <a:off x="822960" y="2468880"/>
+            <a:ext cx="5029200" cy="640080"/>
+          </a:xfrm>
+          <a:prstGeom prst="rect">
+            <a:avLst/>
+          </a:prstGeom>
+          <a:noFill/>
+          <a:ln/>
+        </p:spPr>
+        <p:txBody>
+          <a:bodyPr wrap="square" lIns="0" tIns="0" rIns="0" bIns="0" rtlCol="0" anchor="ctr"/>
+          <a:lstStyle/>
+          <a:p>
+            <a:pPr indent="0" marL="0">
+              <a:buNone/>
+            </a:pPr>
+            <a:r>
+              <a:rPr lang="en-US" sz="1700" b="1" dirty="0">
+                <a:solidFill>
+                  <a:srgbClr val="1A3C34"/>
+                </a:solidFill>
+                <a:latin typeface="Arial" pitchFamily="34" charset="0"/>
+                <a:ea typeface="Arial" pitchFamily="34" charset="-122"/>
+                <a:cs typeface="Arial" pitchFamily="34" charset="-120"/>
+              </a:rPr>
+              <a:t>Não usa dados de pacientes para treinamento</a:t>
+            </a:r>
+            <a:endParaRPr lang="en-US" sz="1700" dirty="0"/>
+          </a:p>
+        </p:txBody>
+      </p:sp>
+      <p:sp>
+        <p:nvSpPr>
+          <p:cNvPr id="11" name="Shape 9"/>
+          <p:cNvSpPr/>
+          <p:nvPr/>
+        </p:nvSpPr>
+        <p:spPr>
+          <a:xfrm>
+            <a:off x="6217920" y="2542032"/>
+            <a:ext cx="128016" cy="128016"/>
+          </a:xfrm>
+          <a:prstGeom prst="rect">
+            <a:avLst/>
+          </a:prstGeom>
+          <a:solidFill>
+            <a:srgbClr val="DC2626"/>
+          </a:solidFill>
+          <a:ln w="12700">
+            <a:solidFill>
+              <a:srgbClr val="DC2626"/>
+            </a:solidFill>
+            <a:prstDash val="solid"/>
+          </a:ln>
+        </p:spPr>
+      </p:sp>
+      <p:sp>
+        <p:nvSpPr>
+          <p:cNvPr id="12" name="Text 10"/>
+          <p:cNvSpPr/>
+          <p:nvPr/>
+        </p:nvSpPr>
+        <p:spPr>
+          <a:xfrm>
+            <a:off x="6492240" y="2468880"/>
+            <a:ext cx="5029200" cy="640080"/>
+          </a:xfrm>
+          <a:prstGeom prst="rect">
+            <a:avLst/>
+          </a:prstGeom>
+          <a:noFill/>
+          <a:ln/>
+        </p:spPr>
+        <p:txBody>
+          <a:bodyPr wrap="square" lIns="0" tIns="0" rIns="0" bIns="0" rtlCol="0" anchor="ctr"/>
+          <a:lstStyle/>
+          <a:p>
+            <a:pPr indent="0" marL="0">
+              <a:buNone/>
+            </a:pPr>
+            <a:r>
+              <a:rPr lang="en-US" sz="1700" b="1" dirty="0">
+                <a:solidFill>
+                  <a:srgbClr val="1A3C34"/>
+                </a:solidFill>
+                <a:latin typeface="Arial" pitchFamily="34" charset="0"/>
+                <a:ea typeface="Arial" pitchFamily="34" charset="-122"/>
+                <a:cs typeface="Arial" pitchFamily="34" charset="-120"/>
+              </a:rPr>
+              <a:t>Não responde pacientes diretamente — é para uso profissional</a:t>
+            </a:r>
+            <a:endParaRPr lang="en-US" sz="1700" dirty="0"/>
+          </a:p>
+        </p:txBody>
+      </p:sp>
+      <p:sp>
+        <p:nvSpPr>
+          <p:cNvPr id="13" name="Shape 11"/>
+          <p:cNvSpPr/>
+          <p:nvPr/>
+        </p:nvSpPr>
+        <p:spPr>
+          <a:xfrm>
+            <a:off x="0" y="3840480"/>
+            <a:ext cx="12188952" cy="1371600"/>
+          </a:xfrm>
+          <a:prstGeom prst="rect">
+            <a:avLst/>
+          </a:prstGeom>
+          <a:solidFill>
+            <a:srgbClr val="EAF2F0"/>
+          </a:solidFill>
+          <a:ln w="12700">
+            <a:solidFill>
+              <a:srgbClr val="EAF2F0"/>
+            </a:solidFill>
+            <a:prstDash val="solid"/>
+          </a:ln>
+        </p:spPr>
+      </p:sp>
+      <p:sp>
+        <p:nvSpPr>
+          <p:cNvPr id="14" name="Text 12"/>
+          <p:cNvSpPr/>
+          <p:nvPr/>
+        </p:nvSpPr>
+        <p:spPr>
+          <a:xfrm>
+            <a:off x="548640" y="3931920"/>
+            <a:ext cx="11091672" cy="822960"/>
+          </a:xfrm>
+          <a:prstGeom prst="rect">
+            <a:avLst/>
+          </a:prstGeom>
+          <a:noFill/>
+          <a:ln/>
+        </p:spPr>
+        <p:txBody>
+          <a:bodyPr wrap="square" lIns="0" tIns="0" rIns="0" bIns="0" rtlCol="0" anchor="ctr"/>
+          <a:lstStyle/>
+          <a:p>
+            <a:pPr indent="0" marL="0">
+              <a:buNone/>
+            </a:pPr>
+            <a:r>
+              <a:rPr lang="en-US" sz="1600" i="1" dirty="0">
+                <a:solidFill>
+                  <a:srgbClr val="155E56"/>
+                </a:solidFill>
+                <a:latin typeface="Georgia" pitchFamily="34" charset="0"/>
+                <a:ea typeface="Georgia" pitchFamily="34" charset="-122"/>
+                <a:cs typeface="Georgia" pitchFamily="34" charset="-120"/>
+              </a:rPr>
+              <a:t>O uso como ferramenta de apoio à decisão clínica é permitido e está alinhado com as discussões do CFM sobre uso responsável de tecnologia em telemedicina e saúde digital.</a:t>
+            </a:r>
+            <a:endParaRPr lang="en-US" sz="1600" dirty="0"/>
+          </a:p>
+        </p:txBody>
+      </p:sp>
+      <p:sp>
+        <p:nvSpPr>
+          <p:cNvPr id="15" name="Text 13"/>
+          <p:cNvSpPr/>
+          <p:nvPr/>
+        </p:nvSpPr>
+        <p:spPr>
+          <a:xfrm>
+            <a:off x="548640" y="4846320"/>
+            <a:ext cx="11091672" cy="457200"/>
+          </a:xfrm>
+          <a:prstGeom prst="rect">
+            <a:avLst/>
+          </a:prstGeom>
+          <a:noFill/>
+          <a:ln/>
+        </p:spPr>
+        <p:txBody>
+          <a:bodyPr wrap="square" lIns="0" tIns="0" rIns="0" bIns="0" rtlCol="0" anchor="ctr"/>
+          <a:lstStyle/>
+          <a:p>
+            <a:pPr indent="0" marL="0">
+              <a:buNone/>
+            </a:pPr>
+            <a:r>
+              <a:rPr lang="en-US" sz="1200" dirty="0">
+                <a:solidFill>
+                  <a:srgbClr val="5F6F6C"/>
+                </a:solidFill>
+                <a:latin typeface="Arial" pitchFamily="34" charset="0"/>
+                <a:ea typeface="Arial" pitchFamily="34" charset="-122"/>
+                <a:cs typeface="Arial" pitchFamily="34" charset="-120"/>
+              </a:rPr>
+              <a:t>Referência: CFM Res. 1.821/2007 · CFM Nota Técnica sobre IA em saúde · LGPD art. 11</a:t>
+            </a:r>
+            <a:endParaRPr lang="en-US" sz="1200" dirty="0"/>
+          </a:p>
+        </p:txBody>
+      </p:sp>
+    </p:spTree>
+  </p:cSld>
+  <p:clrMapOvr>
+    <a:masterClrMapping/>
+  </p:clrMapOvr>
+</p:sld>
+</file>
+
+<file path=ppt/slides/slide6.xml><?xml version="1.0" encoding="utf-8"?>
+<p:sld xmlns:a="http://schemas.openxmlformats.org/drawingml/2006/main" xmlns:r="http://schemas.openxmlformats.org/officeDocument/2006/relationships" xmlns:p="http://schemas.openxmlformats.org/presentationml/2006/main">
+  <p:cSld name="Slide 6">
+    <p:bg>
+      <p:bgPr>
+        <a:solidFill>
+          <a:srgbClr val="FFFFFF"/>
+        </a:solidFill>
+      </p:bgPr>
+    </p:bg>
+    <p:spTree>
+      <p:nvGrpSpPr>
+        <p:cNvPr id="1" name=""/>
+        <p:cNvGrpSpPr/>
+        <p:nvPr/>
+      </p:nvGrpSpPr>
+      <p:grpSpPr>
+        <a:xfrm>
+          <a:off x="0" y="0"/>
+          <a:ext cx="0" cy="0"/>
+          <a:chOff x="0" y="0"/>
+          <a:chExt cx="0" cy="0"/>
+        </a:xfrm>
+      </p:grpSpPr>
+      <p:sp>
+        <p:nvSpPr>
+          <p:cNvPr id="2" name="Text 0"/>
+          <p:cNvSpPr/>
+          <p:nvPr/>
+        </p:nvSpPr>
+        <p:spPr>
+          <a:xfrm>
+            <a:off x="548640" y="6446520"/>
+            <a:ext cx="5486400" cy="274320"/>
+          </a:xfrm>
+          <a:prstGeom prst="rect">
+            <a:avLst/>
+          </a:prstGeom>
+          <a:noFill/>
+          <a:ln/>
+        </p:spPr>
+        <p:txBody>
+          <a:bodyPr wrap="square" lIns="0" tIns="0" rIns="0" bIns="0" rtlCol="0" anchor="ctr"/>
+          <a:lstStyle/>
+          <a:p>
+            <a:pPr indent="0" marL="0">
+              <a:buNone/>
+            </a:pPr>
+            <a:r>
+              <a:rPr lang="en-US" sz="1000" dirty="0">
+                <a:solidFill>
+                  <a:srgbClr val="5F6F6C"/>
+                </a:solidFill>
+                <a:latin typeface="Arial" pitchFamily="34" charset="0"/>
+                <a:ea typeface="Arial" pitchFamily="34" charset="-122"/>
+                <a:cs typeface="Arial" pitchFamily="34" charset="-120"/>
+              </a:rPr>
+              <a:t>BeansTech · Benchmark Cego · Confidencial</a:t>
+            </a:r>
+            <a:endParaRPr lang="en-US" sz="1000" dirty="0"/>
+          </a:p>
+        </p:txBody>
+      </p:sp>
+      <p:sp>
+        <p:nvSpPr>
+          <p:cNvPr id="3" name="Text 1"/>
+          <p:cNvSpPr/>
+          <p:nvPr/>
+        </p:nvSpPr>
+        <p:spPr>
+          <a:xfrm>
+            <a:off x="11091672" y="6446520"/>
+            <a:ext cx="548640" cy="274320"/>
+          </a:xfrm>
+          <a:prstGeom prst="rect">
+            <a:avLst/>
+          </a:prstGeom>
+          <a:noFill/>
+          <a:ln/>
+        </p:spPr>
+        <p:txBody>
+          <a:bodyPr wrap="square" lIns="0" tIns="0" rIns="0" bIns="0" rtlCol="0" anchor="ctr"/>
+          <a:lstStyle/>
+          <a:p>
+            <a:pPr algn="r" indent="0" marL="0">
+              <a:buNone/>
+            </a:pPr>
+            <a:r>
+              <a:rPr lang="en-US" sz="1000" dirty="0">
+                <a:solidFill>
+                  <a:srgbClr val="5F6F6C"/>
+                </a:solidFill>
+                <a:latin typeface="Arial" pitchFamily="34" charset="0"/>
+                <a:ea typeface="Arial" pitchFamily="34" charset="-122"/>
+                <a:cs typeface="Arial" pitchFamily="34" charset="-120"/>
+              </a:rPr>
+              <a:t>6</a:t>
+            </a:r>
+            <a:endParaRPr lang="en-US" sz="1000" dirty="0"/>
+          </a:p>
+        </p:txBody>
+      </p:sp>
+      <p:sp>
+        <p:nvSpPr>
+          <p:cNvPr id="4" name="Text 2"/>
+          <p:cNvSpPr/>
+          <p:nvPr/>
+        </p:nvSpPr>
+        <p:spPr>
+          <a:xfrm>
+            <a:off x="548640" y="365760"/>
+            <a:ext cx="11091672" cy="731520"/>
+          </a:xfrm>
+          <a:prstGeom prst="rect">
+            <a:avLst/>
+          </a:prstGeom>
+          <a:noFill/>
+          <a:ln/>
+        </p:spPr>
+        <p:txBody>
+          <a:bodyPr wrap="square" lIns="0" tIns="0" rIns="0" bIns="0" rtlCol="0" anchor="ctr"/>
+          <a:lstStyle/>
+          <a:p>
+            <a:pPr indent="0" marL="0">
+              <a:buNone/>
+            </a:pPr>
+            <a:r>
+              <a:rPr lang="en-US" sz="3000" b="1" dirty="0">
+                <a:solidFill>
+                  <a:srgbClr val="155E56"/>
+                </a:solidFill>
+                <a:latin typeface="Georgia" pitchFamily="34" charset="0"/>
+                <a:ea typeface="Georgia" pitchFamily="34" charset="-122"/>
+                <a:cs typeface="Georgia" pitchFamily="34" charset="-120"/>
+              </a:rPr>
+              <a:t>Metodologia do Teste Cego</a:t>
+            </a:r>
+            <a:endParaRPr lang="en-US" sz="3000" dirty="0"/>
+          </a:p>
+        </p:txBody>
+      </p:sp>
+      <p:sp>
+        <p:nvSpPr>
+          <p:cNvPr id="5" name="Text 3"/>
+          <p:cNvSpPr/>
+          <p:nvPr/>
+        </p:nvSpPr>
+        <p:spPr>
+          <a:xfrm>
+            <a:off x="548640" y="1371600"/>
+            <a:ext cx="2651760" cy="914400"/>
+          </a:xfrm>
+          <a:prstGeom prst="rect">
+            <a:avLst/>
+          </a:prstGeom>
+          <a:noFill/>
+          <a:ln/>
+        </p:spPr>
+        <p:txBody>
+          <a:bodyPr wrap="square" lIns="0" tIns="0" rIns="0" bIns="0" rtlCol="0" anchor="ctr"/>
+          <a:lstStyle/>
+          <a:p>
+            <a:pPr indent="0" marL="0">
+              <a:buNone/>
+            </a:pPr>
+            <a:r>
+              <a:rPr lang="en-US" sz="4800" b="1" dirty="0">
+                <a:solidFill>
+                  <a:srgbClr val="155E56"/>
+                </a:solidFill>
+                <a:latin typeface="Georgia" pitchFamily="34" charset="0"/>
+                <a:ea typeface="Georgia" pitchFamily="34" charset="-122"/>
+                <a:cs typeface="Georgia" pitchFamily="34" charset="-120"/>
+              </a:rPr>
+              <a:t>200</a:t>
+            </a:r>
+            <a:endParaRPr lang="en-US" sz="4800" dirty="0"/>
+          </a:p>
+        </p:txBody>
+      </p:sp>
+      <p:sp>
+        <p:nvSpPr>
+          <p:cNvPr id="6" name="Text 4"/>
+          <p:cNvSpPr/>
+          <p:nvPr/>
+        </p:nvSpPr>
+        <p:spPr>
+          <a:xfrm>
+            <a:off x="548640" y="2286000"/>
+            <a:ext cx="2651760" cy="457200"/>
+          </a:xfrm>
+          <a:prstGeom prst="rect">
+            <a:avLst/>
+          </a:prstGeom>
+          <a:noFill/>
+          <a:ln/>
+        </p:spPr>
+        <p:txBody>
+          <a:bodyPr wrap="square" lIns="0" tIns="0" rIns="0" bIns="0" rtlCol="0" anchor="ctr"/>
+          <a:lstStyle/>
+          <a:p>
+            <a:pPr indent="0" marL="0">
+              <a:buNone/>
+            </a:pPr>
+            <a:r>
+              <a:rPr lang="en-US" sz="1300" dirty="0">
+                <a:solidFill>
+                  <a:srgbClr val="5F6F6C"/>
+                </a:solidFill>
+                <a:latin typeface="Arial" pitchFamily="34" charset="0"/>
+                <a:ea typeface="Arial" pitchFamily="34" charset="-122"/>
+                <a:cs typeface="Arial" pitchFamily="34" charset="-120"/>
+              </a:rPr>
+              <a:t>casos clínicos</a:t>
+            </a:r>
+            <a:endParaRPr lang="en-US" sz="1300" dirty="0"/>
+          </a:p>
+        </p:txBody>
+      </p:sp>
+      <p:sp>
+        <p:nvSpPr>
+          <p:cNvPr id="7" name="Text 5"/>
+          <p:cNvSpPr/>
+          <p:nvPr/>
+        </p:nvSpPr>
+        <p:spPr>
+          <a:xfrm>
+            <a:off x="3429000" y="1371600"/>
+            <a:ext cx="2651760" cy="914400"/>
+          </a:xfrm>
+          <a:prstGeom prst="rect">
+            <a:avLst/>
+          </a:prstGeom>
+          <a:noFill/>
+          <a:ln/>
+        </p:spPr>
+        <p:txBody>
+          <a:bodyPr wrap="square" lIns="0" tIns="0" rIns="0" bIns="0" rtlCol="0" anchor="ctr"/>
+          <a:lstStyle/>
+          <a:p>
+            <a:pPr indent="0" marL="0">
+              <a:buNone/>
+            </a:pPr>
+            <a:r>
+              <a:rPr lang="en-US" sz="4800" b="1" dirty="0">
+                <a:solidFill>
+                  <a:srgbClr val="155E56"/>
+                </a:solidFill>
+                <a:latin typeface="Georgia" pitchFamily="34" charset="0"/>
+                <a:ea typeface="Georgia" pitchFamily="34" charset="-122"/>
+                <a:cs typeface="Georgia" pitchFamily="34" charset="-120"/>
+              </a:rPr>
+              <a:t>9</a:t>
+            </a:r>
+            <a:endParaRPr lang="en-US" sz="4800" dirty="0"/>
+          </a:p>
+        </p:txBody>
+      </p:sp>
+      <p:sp>
+        <p:nvSpPr>
+          <p:cNvPr id="8" name="Text 6"/>
+          <p:cNvSpPr/>
+          <p:nvPr/>
+        </p:nvSpPr>
+        <p:spPr>
+          <a:xfrm>
+            <a:off x="3429000" y="2286000"/>
+            <a:ext cx="2651760" cy="457200"/>
+          </a:xfrm>
+          <a:prstGeom prst="rect">
+            <a:avLst/>
+          </a:prstGeom>
+          <a:noFill/>
+          <a:ln/>
+        </p:spPr>
+        <p:txBody>
+          <a:bodyPr wrap="square" lIns="0" tIns="0" rIns="0" bIns="0" rtlCol="0" anchor="ctr"/>
+          <a:lstStyle/>
+          <a:p>
+            <a:pPr indent="0" marL="0">
+              <a:buNone/>
+            </a:pPr>
+            <a:r>
+              <a:rPr lang="en-US" sz="1300" dirty="0">
+                <a:solidFill>
+                  <a:srgbClr val="5F6F6C"/>
+                </a:solidFill>
+                <a:latin typeface="Arial" pitchFamily="34" charset="0"/>
+                <a:ea typeface="Arial" pitchFamily="34" charset="-122"/>
+                <a:cs typeface="Arial" pitchFamily="34" charset="-120"/>
+              </a:rPr>
+              <a:t>modelos (A-I)</a:t>
+            </a:r>
+            <a:endParaRPr lang="en-US" sz="1300" dirty="0"/>
+          </a:p>
+        </p:txBody>
+      </p:sp>
+      <p:sp>
+        <p:nvSpPr>
+          <p:cNvPr id="9" name="Text 7"/>
+          <p:cNvSpPr/>
+          <p:nvPr/>
+        </p:nvSpPr>
+        <p:spPr>
+          <a:xfrm>
+            <a:off x="6309360" y="1371600"/>
+            <a:ext cx="2651760" cy="914400"/>
+          </a:xfrm>
+          <a:prstGeom prst="rect">
+            <a:avLst/>
+          </a:prstGeom>
+          <a:noFill/>
+          <a:ln/>
+        </p:spPr>
+        <p:txBody>
+          <a:bodyPr wrap="square" lIns="0" tIns="0" rIns="0" bIns="0" rtlCol="0" anchor="ctr"/>
+          <a:lstStyle/>
+          <a:p>
+            <a:pPr indent="0" marL="0">
+              <a:buNone/>
+            </a:pPr>
+            <a:r>
+              <a:rPr lang="en-US" sz="4800" b="1" dirty="0">
+                <a:solidFill>
+                  <a:srgbClr val="155E56"/>
+                </a:solidFill>
+                <a:latin typeface="Georgia" pitchFamily="34" charset="0"/>
+                <a:ea typeface="Georgia" pitchFamily="34" charset="-122"/>
+                <a:cs typeface="Georgia" pitchFamily="34" charset="-120"/>
+              </a:rPr>
+              <a:t>23</a:t>
+            </a:r>
+            <a:endParaRPr lang="en-US" sz="4800" dirty="0"/>
+          </a:p>
+        </p:txBody>
+      </p:sp>
+      <p:sp>
+        <p:nvSpPr>
+          <p:cNvPr id="10" name="Text 8"/>
+          <p:cNvSpPr/>
+          <p:nvPr/>
+        </p:nvSpPr>
+        <p:spPr>
+          <a:xfrm>
+            <a:off x="6309360" y="2286000"/>
+            <a:ext cx="2651760" cy="457200"/>
+          </a:xfrm>
+          <a:prstGeom prst="rect">
+            <a:avLst/>
+          </a:prstGeom>
+          <a:noFill/>
+          <a:ln/>
+        </p:spPr>
+        <p:txBody>
+          <a:bodyPr wrap="square" lIns="0" tIns="0" rIns="0" bIns="0" rtlCol="0" anchor="ctr"/>
+          <a:lstStyle/>
+          <a:p>
+            <a:pPr indent="0" marL="0">
+              <a:buNone/>
+            </a:pPr>
+            <a:r>
+              <a:rPr lang="en-US" sz="1300" dirty="0">
+                <a:solidFill>
+                  <a:srgbClr val="5F6F6C"/>
+                </a:solidFill>
+                <a:latin typeface="Arial" pitchFamily="34" charset="0"/>
+                <a:ea typeface="Arial" pitchFamily="34" charset="-122"/>
+                <a:cs typeface="Arial" pitchFamily="34" charset="-120"/>
+              </a:rPr>
+              <a:t>especialidades</a:t>
+            </a:r>
+            <a:endParaRPr lang="en-US" sz="1300" dirty="0"/>
+          </a:p>
+        </p:txBody>
+      </p:sp>
+      <p:sp>
+        <p:nvSpPr>
+          <p:cNvPr id="11" name="Text 9"/>
+          <p:cNvSpPr/>
+          <p:nvPr/>
+        </p:nvSpPr>
+        <p:spPr>
+          <a:xfrm>
+            <a:off x="9189720" y="1371600"/>
+            <a:ext cx="2651760" cy="914400"/>
+          </a:xfrm>
+          <a:prstGeom prst="rect">
+            <a:avLst/>
+          </a:prstGeom>
+          <a:noFill/>
+          <a:ln/>
+        </p:spPr>
+        <p:txBody>
+          <a:bodyPr wrap="square" lIns="0" tIns="0" rIns="0" bIns="0" rtlCol="0" anchor="ctr"/>
+          <a:lstStyle/>
+          <a:p>
+            <a:pPr indent="0" marL="0">
+              <a:buNone/>
+            </a:pPr>
+            <a:r>
+              <a:rPr lang="en-US" sz="4800" b="1" dirty="0">
+                <a:solidFill>
+                  <a:srgbClr val="D97B1E"/>
+                </a:solidFill>
+                <a:latin typeface="Georgia" pitchFamily="34" charset="0"/>
+                <a:ea typeface="Georgia" pitchFamily="34" charset="-122"/>
+                <a:cs typeface="Georgia" pitchFamily="34" charset="-120"/>
+              </a:rPr>
+              <a:t>1.797</a:t>
+            </a:r>
+            <a:endParaRPr lang="en-US" sz="4800" dirty="0"/>
+          </a:p>
+        </p:txBody>
+      </p:sp>
+      <p:sp>
+        <p:nvSpPr>
+          <p:cNvPr id="12" name="Text 10"/>
+          <p:cNvSpPr/>
+          <p:nvPr/>
+        </p:nvSpPr>
+        <p:spPr>
+          <a:xfrm>
+            <a:off x="9189720" y="2286000"/>
+            <a:ext cx="2651760" cy="457200"/>
+          </a:xfrm>
+          <a:prstGeom prst="rect">
+            <a:avLst/>
+          </a:prstGeom>
+          <a:noFill/>
+          <a:ln/>
+        </p:spPr>
+        <p:txBody>
+          <a:bodyPr wrap="square" lIns="0" tIns="0" rIns="0" bIns="0" rtlCol="0" anchor="ctr"/>
+          <a:lstStyle/>
+          <a:p>
+            <a:pPr indent="0" marL="0">
+              <a:buNone/>
+            </a:pPr>
+            <a:r>
+              <a:rPr lang="en-US" sz="1300" dirty="0">
+                <a:solidFill>
+                  <a:srgbClr val="5F6F6C"/>
+                </a:solidFill>
+                <a:latin typeface="Arial" pitchFamily="34" charset="0"/>
+                <a:ea typeface="Arial" pitchFamily="34" charset="-122"/>
+                <a:cs typeface="Arial" pitchFamily="34" charset="-120"/>
+              </a:rPr>
+              <a:t>respostas</a:t>
+            </a:r>
+            <a:endParaRPr lang="en-US" sz="1300" dirty="0"/>
+          </a:p>
+        </p:txBody>
+      </p:sp>
+      <p:sp>
+        <p:nvSpPr>
+          <p:cNvPr id="13" name="Shape 11"/>
+          <p:cNvSpPr/>
+          <p:nvPr/>
+        </p:nvSpPr>
+        <p:spPr>
+          <a:xfrm>
+            <a:off x="548640" y="2926080"/>
+            <a:ext cx="11091672" cy="0"/>
+          </a:xfrm>
+          <a:prstGeom prst="line">
+            <a:avLst/>
+          </a:prstGeom>
+          <a:noFill/>
+          <a:ln w="9525">
+            <a:solidFill>
+              <a:srgbClr val="CFDCD9"/>
+            </a:solidFill>
+            <a:prstDash val="solid"/>
+          </a:ln>
+        </p:spPr>
+      </p:sp>
+      <p:sp>
+        <p:nvSpPr>
+          <p:cNvPr id="14" name="Text 12"/>
+          <p:cNvSpPr/>
+          <p:nvPr/>
+        </p:nvSpPr>
+        <p:spPr>
+          <a:xfrm>
+            <a:off x="548640" y="3108960"/>
+            <a:ext cx="5943600" cy="1097280"/>
+          </a:xfrm>
+          <a:prstGeom prst="rect">
+            <a:avLst/>
+          </a:prstGeom>
+          <a:noFill/>
+          <a:ln/>
+        </p:spPr>
+        <p:txBody>
+          <a:bodyPr wrap="square" lIns="0" tIns="0" rIns="0" bIns="0" rtlCol="0" anchor="ctr"/>
+          <a:lstStyle/>
+          <a:p>
+            <a:pPr indent="0" marL="0">
+              <a:buNone/>
+            </a:pPr>
+            <a:r>
+              <a:rPr lang="en-US" sz="1600" b="1" dirty="0">
+                <a:solidFill>
+                  <a:srgbClr val="155E56"/>
+                </a:solidFill>
+                <a:latin typeface="Arial" pitchFamily="34" charset="0"/>
+                <a:ea typeface="Arial" pitchFamily="34" charset="-122"/>
+                <a:cs typeface="Arial" pitchFamily="34" charset="-120"/>
+              </a:rPr>
+              <a:t>Cego: </a:t>
+            </a:r>
+            <a:pPr indent="0" marL="0">
+              <a:buNone/>
+            </a:pPr>
+            <a:r>
+              <a:rPr lang="en-US" sz="1400" dirty="0">
+                <a:solidFill>
+                  <a:srgbClr val="18211F"/>
+                </a:solidFill>
+                <a:latin typeface="Arial" pitchFamily="34" charset="0"/>
+                <a:ea typeface="Arial" pitchFamily="34" charset="-122"/>
+                <a:cs typeface="Arial" pitchFamily="34" charset="-120"/>
+              </a:rPr>
+              <a:t>você recebe 200 casos com respostas de 9 modelos (A até I), sem saber qual gerou cada resposta. Identidades reveladas após a revisão completa.</a:t>
+            </a:r>
+            <a:endParaRPr lang="en-US" sz="1600" dirty="0"/>
+          </a:p>
+        </p:txBody>
+      </p:sp>
+      <p:sp>
+        <p:nvSpPr>
+          <p:cNvPr id="15" name="Text 13"/>
+          <p:cNvSpPr/>
+          <p:nvPr/>
+        </p:nvSpPr>
+        <p:spPr>
+          <a:xfrm>
+            <a:off x="6675120" y="3108960"/>
+            <a:ext cx="4937760" cy="1097280"/>
+          </a:xfrm>
+          <a:prstGeom prst="rect">
+            <a:avLst/>
+          </a:prstGeom>
+          <a:noFill/>
+          <a:ln/>
+        </p:spPr>
+        <p:txBody>
+          <a:bodyPr wrap="square" lIns="0" tIns="0" rIns="0" bIns="0" rtlCol="0" anchor="ctr"/>
+          <a:lstStyle/>
+          <a:p>
+            <a:pPr indent="0" marL="0">
+              <a:buNone/>
+            </a:pPr>
+            <a:r>
+              <a:rPr lang="en-US" sz="1600" b="1" dirty="0">
+                <a:solidFill>
+                  <a:srgbClr val="155E56"/>
+                </a:solidFill>
+                <a:latin typeface="Arial" pitchFamily="34" charset="0"/>
+                <a:ea typeface="Arial" pitchFamily="34" charset="-122"/>
+                <a:cs typeface="Arial" pitchFamily="34" charset="-120"/>
+              </a:rPr>
+              <a:t>Casos: </a:t>
+            </a:r>
+            <a:pPr indent="0" marL="0">
+              <a:buNone/>
+            </a:pPr>
+            <a:r>
+              <a:rPr lang="en-US" sz="1400" dirty="0">
+                <a:solidFill>
+                  <a:srgbClr val="18211F"/>
+                </a:solidFill>
+                <a:latin typeface="Arial" pitchFamily="34" charset="0"/>
+                <a:ea typeface="Arial" pitchFamily="34" charset="-122"/>
+                <a:cs typeface="Arial" pitchFamily="34" charset="-120"/>
+              </a:rPr>
+              <a:t>perguntas clínicas reais com gabarito validado. Cada caso tem afirmações críticas e conteúdo proibido.</a:t>
+            </a:r>
+            <a:endParaRPr lang="en-US" sz="1600" dirty="0"/>
+          </a:p>
+        </p:txBody>
+      </p:sp>
+      <p:sp>
+        <p:nvSpPr>
+          <p:cNvPr id="16" name="Text 14"/>
+          <p:cNvSpPr/>
+          <p:nvPr/>
+        </p:nvSpPr>
+        <p:spPr>
+          <a:xfrm>
+            <a:off x="548640" y="4572000"/>
+            <a:ext cx="11091672" cy="548640"/>
+          </a:xfrm>
+          <a:prstGeom prst="rect">
+            <a:avLst/>
+          </a:prstGeom>
+          <a:noFill/>
+          <a:ln/>
+        </p:spPr>
+        <p:txBody>
+          <a:bodyPr wrap="square" lIns="0" tIns="0" rIns="0" bIns="0" rtlCol="0" anchor="ctr"/>
+          <a:lstStyle/>
+          <a:p>
+            <a:pPr indent="0" marL="0">
+              <a:buNone/>
+            </a:pPr>
+            <a:r>
+              <a:rPr lang="en-US" sz="1400" b="1" dirty="0">
+                <a:solidFill>
+                  <a:srgbClr val="155E56"/>
+                </a:solidFill>
+                <a:latin typeface="Arial" pitchFamily="34" charset="0"/>
+                <a:ea typeface="Arial" pitchFamily="34" charset="-122"/>
+                <a:cs typeface="Arial" pitchFamily="34" charset="-120"/>
+              </a:rPr>
+              <a:t>Duração: </a:t>
+            </a:r>
+            <a:pPr indent="0" marL="0">
+              <a:buNone/>
+            </a:pPr>
+            <a:r>
+              <a:rPr lang="en-US" sz="1400" dirty="0">
+                <a:solidFill>
+                  <a:srgbClr val="18211F"/>
+                </a:solidFill>
+                <a:latin typeface="Arial" pitchFamily="34" charset="0"/>
+                <a:ea typeface="Arial" pitchFamily="34" charset="-122"/>
+                <a:cs typeface="Arial" pitchFamily="34" charset="-120"/>
+              </a:rPr>
+              <a:t>~6 horas no total. Divida em sessões de 30-60 minutos. Pausar e continuar quando quiser.</a:t>
+            </a:r>
+            <a:endParaRPr lang="en-US" sz="1400" dirty="0"/>
+          </a:p>
+        </p:txBody>
+      </p:sp>
+      <p:sp>
+        <p:nvSpPr>
+          <p:cNvPr id="17" name="Text 15"/>
+          <p:cNvSpPr/>
+          <p:nvPr/>
+        </p:nvSpPr>
+        <p:spPr>
+          <a:xfrm>
+            <a:off x="548640" y="5212080"/>
+            <a:ext cx="11091672" cy="457200"/>
+          </a:xfrm>
+          <a:prstGeom prst="rect">
+            <a:avLst/>
+          </a:prstGeom>
+          <a:noFill/>
+          <a:ln/>
+        </p:spPr>
+        <p:txBody>
+          <a:bodyPr wrap="square" lIns="0" tIns="0" rIns="0" bIns="0" rtlCol="0" anchor="ctr"/>
+          <a:lstStyle/>
+          <a:p>
+            <a:pPr indent="0" marL="0">
+              <a:buNone/>
+            </a:pPr>
+            <a:r>
+              <a:rPr lang="en-US" sz="1400" b="1" dirty="0">
+                <a:solidFill>
+                  <a:srgbClr val="155E56"/>
+                </a:solidFill>
+                <a:latin typeface="Arial" pitchFamily="34" charset="0"/>
+                <a:ea typeface="Arial" pitchFamily="34" charset="-122"/>
+                <a:cs typeface="Arial" pitchFamily="34" charset="-120"/>
+              </a:rPr>
+              <a:t>Onde: </a:t>
+            </a:r>
+            <a:pPr indent="0" marL="0">
+              <a:buNone/>
+            </a:pPr>
+            <a:r>
+              <a:rPr lang="en-US" sz="1400" dirty="0">
+                <a:solidFill>
+                  <a:srgbClr val="18211F"/>
+                </a:solidFill>
+                <a:latin typeface="Arial" pitchFamily="34" charset="0"/>
+                <a:ea typeface="Arial" pitchFamily="34" charset="-122"/>
+                <a:cs typeface="Arial" pitchFamily="34" charset="-120"/>
+              </a:rPr>
+              <a:t>teste.beanshealth.com.br/teste — plataforma online com formulário integrado.</a:t>
+            </a:r>
+            <a:endParaRPr lang="en-US" sz="1400" dirty="0"/>
+          </a:p>
+        </p:txBody>
+      </p:sp>
+    </p:spTree>
+  </p:cSld>
+  <p:clrMapOvr>
+    <a:masterClrMapping/>
+  </p:clrMapOvr>
+</p:sld>
+</file>
+
+<file path=ppt/slides/slide7.xml><?xml version="1.0" encoding="utf-8"?>
+<p:sld xmlns:a="http://schemas.openxmlformats.org/drawingml/2006/main" xmlns:r="http://schemas.openxmlformats.org/officeDocument/2006/relationships" xmlns:p="http://schemas.openxmlformats.org/presentationml/2006/main">
+  <p:cSld name="Slide 7">
+    <p:bg>
+      <p:bgPr>
+        <a:solidFill>
+          <a:srgbClr val="FFFFFF"/>
+        </a:solidFill>
+      </p:bgPr>
+    </p:bg>
+    <p:spTree>
+      <p:nvGrpSpPr>
+        <p:cNvPr id="1" name=""/>
+        <p:cNvGrpSpPr/>
+        <p:nvPr/>
+      </p:nvGrpSpPr>
+      <p:grpSpPr>
+        <a:xfrm>
+          <a:off x="0" y="0"/>
+          <a:ext cx="0" cy="0"/>
+          <a:chOff x="0" y="0"/>
+          <a:chExt cx="0" cy="0"/>
+        </a:xfrm>
+      </p:grpSpPr>
+      <p:sp>
+        <p:nvSpPr>
+          <p:cNvPr id="2" name="Text 0"/>
+          <p:cNvSpPr/>
+          <p:nvPr/>
+        </p:nvSpPr>
+        <p:spPr>
+          <a:xfrm>
+            <a:off x="548640" y="6446520"/>
+            <a:ext cx="5486400" cy="274320"/>
+          </a:xfrm>
+          <a:prstGeom prst="rect">
+            <a:avLst/>
+          </a:prstGeom>
+          <a:noFill/>
+          <a:ln/>
+        </p:spPr>
+        <p:txBody>
+          <a:bodyPr wrap="square" lIns="0" tIns="0" rIns="0" bIns="0" rtlCol="0" anchor="ctr"/>
+          <a:lstStyle/>
+          <a:p>
+            <a:pPr indent="0" marL="0">
+              <a:buNone/>
+            </a:pPr>
+            <a:r>
+              <a:rPr lang="en-US" sz="1000" dirty="0">
+                <a:solidFill>
+                  <a:srgbClr val="5F6F6C"/>
+                </a:solidFill>
+                <a:latin typeface="Arial" pitchFamily="34" charset="0"/>
+                <a:ea typeface="Arial" pitchFamily="34" charset="-122"/>
+                <a:cs typeface="Arial" pitchFamily="34" charset="-120"/>
+              </a:rPr>
+              <a:t>BeansTech · Benchmark Cego · Confidencial</a:t>
+            </a:r>
+            <a:endParaRPr lang="en-US" sz="1000" dirty="0"/>
+          </a:p>
+        </p:txBody>
+      </p:sp>
+      <p:sp>
+        <p:nvSpPr>
+          <p:cNvPr id="3" name="Text 1"/>
+          <p:cNvSpPr/>
+          <p:nvPr/>
+        </p:nvSpPr>
+        <p:spPr>
+          <a:xfrm>
+            <a:off x="11091672" y="6446520"/>
+            <a:ext cx="548640" cy="274320"/>
+          </a:xfrm>
+          <a:prstGeom prst="rect">
+            <a:avLst/>
+          </a:prstGeom>
+          <a:noFill/>
+          <a:ln/>
+        </p:spPr>
+        <p:txBody>
+          <a:bodyPr wrap="square" lIns="0" tIns="0" rIns="0" bIns="0" rtlCol="0" anchor="ctr"/>
+          <a:lstStyle/>
+          <a:p>
+            <a:pPr algn="r" indent="0" marL="0">
+              <a:buNone/>
+            </a:pPr>
+            <a:r>
+              <a:rPr lang="en-US" sz="1000" dirty="0">
+                <a:solidFill>
+                  <a:srgbClr val="5F6F6C"/>
+                </a:solidFill>
+                <a:latin typeface="Arial" pitchFamily="34" charset="0"/>
+                <a:ea typeface="Arial" pitchFamily="34" charset="-122"/>
+                <a:cs typeface="Arial" pitchFamily="34" charset="-120"/>
+              </a:rPr>
+              <a:t>7</a:t>
+            </a:r>
+            <a:endParaRPr lang="en-US" sz="1000" dirty="0"/>
+          </a:p>
+        </p:txBody>
+      </p:sp>
+      <p:sp>
+        <p:nvSpPr>
+          <p:cNvPr id="4" name="Text 2"/>
+          <p:cNvSpPr/>
+          <p:nvPr/>
+        </p:nvSpPr>
+        <p:spPr>
+          <a:xfrm>
+            <a:off x="548640" y="365760"/>
+            <a:ext cx="11091672" cy="731520"/>
+          </a:xfrm>
+          <a:prstGeom prst="rect">
+            <a:avLst/>
+          </a:prstGeom>
+          <a:noFill/>
+          <a:ln/>
+        </p:spPr>
+        <p:txBody>
+          <a:bodyPr wrap="square" lIns="0" tIns="0" rIns="0" bIns="0" rtlCol="0" anchor="ctr"/>
+          <a:lstStyle/>
+          <a:p>
+            <a:pPr indent="0" marL="0">
+              <a:buNone/>
+            </a:pPr>
+            <a:r>
+              <a:rPr lang="en-US" sz="3000" b="1" dirty="0">
+                <a:solidFill>
+                  <a:srgbClr val="155E56"/>
+                </a:solidFill>
+                <a:latin typeface="Georgia" pitchFamily="34" charset="0"/>
+                <a:ea typeface="Georgia" pitchFamily="34" charset="-122"/>
+                <a:cs typeface="Georgia" pitchFamily="34" charset="-120"/>
+              </a:rPr>
               <a:t>Como Avaliar</a:t>
             </a:r>
             <a:endParaRPr lang="en-US" sz="3000" dirty="0"/>
@@ -3467,7 +5709,7 @@
                 <a:ea typeface="Arial" pitchFamily="34" charset="-122"/>
                 <a:cs typeface="Arial" pitchFamily="34" charset="-120"/>
               </a:rPr>
-              <a:t>Simples e objetivo — menos de 3 minutos por caso</a:t>
+              <a:t>Simples e objetivo — menos de 3 minutos por resposta</a:t>
             </a:r>
             <a:endParaRPr lang="en-US" sz="1500" dirty="0"/>
           </a:p>
@@ -3475,7 +5717,7 @@
       </p:sp>
       <p:graphicFrame>
         <p:nvGraphicFramePr>
-          <p:cNvPr id="6" name="Table 0"/>
+          <p:cNvPr id="8" name="Table 0"/>
           <p:cNvGraphicFramePr>
             <a:graphicFrameLocks noGrp="1"/>
           </p:cNvGraphicFramePr>
@@ -3497,11 +5739,11 @@
               <a:tblPr/>
               <a:tblGrid>
                 <a:gridCol w="2286000"/>
+                <a:gridCol w="2560320"/>
                 <a:gridCol w="2286000"/>
-                <a:gridCol w="2286000"/>
-                <a:gridCol w="2286000"/>
+                <a:gridCol w="2011680"/>
               </a:tblGrid>
-              <a:tr h="594360">
+              <a:tr h="640080">
                 <a:tc>
                   <a:txBody>
                     <a:bodyPr/>
@@ -3775,7 +6017,7 @@
                   </a:tcPr>
                 </a:tc>
               </a:tr>
-              <a:tr h="594360">
+              <a:tr h="640080">
                 <a:tc>
                   <a:txBody>
                     <a:bodyPr/>
@@ -3939,8 +6181,8 @@
         </p:nvSpPr>
         <p:spPr>
           <a:xfrm>
-            <a:off x="0" y="4389120"/>
-            <a:ext cx="12188952" cy="1097280"/>
+            <a:off x="0" y="3749040"/>
+            <a:ext cx="12188952" cy="914400"/>
           </a:xfrm>
           <a:prstGeom prst="rect">
             <a:avLst/>
@@ -3964,8 +6206,8 @@
         </p:nvSpPr>
         <p:spPr>
           <a:xfrm>
-            <a:off x="548640" y="4480560"/>
-            <a:ext cx="11091672" cy="822960"/>
+            <a:off x="548640" y="3840480"/>
+            <a:ext cx="11091672" cy="731520"/>
           </a:xfrm>
           <a:prstGeom prst="rect">
             <a:avLst/>
@@ -4003,7 +6245,7 @@
                 <a:ea typeface="Arial" pitchFamily="34" charset="-122"/>
                 <a:cs typeface="Arial" pitchFamily="34" charset="-120"/>
               </a:rPr>
-              <a:t>Se qualquer modelo cometer erro grave em qualquer caso, ele não passa para produção — independentemente da nota média.</a:t>
+              <a:t>Se qualquer modelo cometer erro grave, ele não passa para produção — independentemente da nota média.</a:t>
             </a:r>
             <a:endParaRPr lang="en-US" sz="1600" dirty="0"/>
           </a:p>
@@ -4017,24 +6259,24 @@
         </p:nvSpPr>
         <p:spPr>
           <a:xfrm>
-            <a:off x="548640" y="5394960"/>
-            <a:ext cx="11091672" cy="731520"/>
-          </a:xfrm>
-          <a:prstGeom prst="rect">
-            <a:avLst/>
-          </a:prstGeom>
-          <a:noFill/>
-          <a:ln/>
-        </p:spPr>
-        <p:txBody>
-          <a:bodyPr wrap="square" lIns="0" tIns="0" rIns="0" bIns="0" rtlCol="0" anchor="ctr"/>
-          <a:lstStyle/>
-          <a:p>
-            <a:pPr indent="0" marL="0">
-              <a:buNone/>
-            </a:pPr>
-            <a:r>
-              <a:rPr lang="en-US" sz="1500" b="1" dirty="0">
+            <a:off x="548640" y="4937760"/>
+            <a:ext cx="11091672" cy="457200"/>
+          </a:xfrm>
+          <a:prstGeom prst="rect">
+            <a:avLst/>
+          </a:prstGeom>
+          <a:noFill/>
+          <a:ln/>
+        </p:spPr>
+        <p:txBody>
+          <a:bodyPr wrap="square" lIns="0" tIns="0" rIns="0" bIns="0" rtlCol="0" anchor="ctr"/>
+          <a:lstStyle/>
+          <a:p>
+            <a:pPr indent="0" marL="0">
+              <a:buNone/>
+            </a:pPr>
+            <a:r>
+              <a:rPr lang="en-US" sz="1400" b="1" dirty="0">
                 <a:solidFill>
                   <a:srgbClr val="155E56"/>
                 </a:solidFill>
@@ -4042,13 +6284,13 @@
                 <a:ea typeface="Arial" pitchFamily="34" charset="-122"/>
                 <a:cs typeface="Arial" pitchFamily="34" charset="-120"/>
               </a:rPr>
-              <a:t>Tempo estimado: </a:t>
-            </a:r>
-            <a:pPr indent="0" marL="0">
-              <a:buNone/>
-            </a:pPr>
-            <a:r>
-              <a:rPr lang="en-US" sz="1500" dirty="0">
+              <a:t>Tempo: </a:t>
+            </a:r>
+            <a:pPr indent="0" marL="0">
+              <a:buNone/>
+            </a:pPr>
+            <a:r>
+              <a:rPr lang="en-US" sz="1400" dirty="0">
                 <a:solidFill>
                   <a:srgbClr val="18211F"/>
                 </a:solidFill>
@@ -4056,9 +6298,48 @@
                 <a:ea typeface="Arial" pitchFamily="34" charset="-122"/>
                 <a:cs typeface="Arial" pitchFamily="34" charset="-120"/>
               </a:rPr>
-              <a:t>200 casos × 9 modelos = 1.800 respostas para avaliar. A ~2 minutos por resposta = ~6 horas. Você pode dividir em sessões.</a:t>
-            </a:r>
-            <a:endParaRPr lang="en-US" sz="1500" dirty="0"/>
+              <a:t>~2 min por resposta · 1.797 avaliações · ~6h total · divisível em sessões.</a:t>
+            </a:r>
+            <a:endParaRPr lang="en-US" sz="1400" dirty="0"/>
+          </a:p>
+        </p:txBody>
+      </p:sp>
+      <p:sp>
+        <p:nvSpPr>
+          <p:cNvPr id="10" name="Text 7"/>
+          <p:cNvSpPr/>
+          <p:nvPr/>
+        </p:nvSpPr>
+        <p:spPr>
+          <a:xfrm>
+            <a:off x="548640" y="5486400"/>
+            <a:ext cx="11091672" cy="365760"/>
+          </a:xfrm>
+          <a:prstGeom prst="rect">
+            <a:avLst/>
+          </a:prstGeom>
+          <a:noFill/>
+          <a:ln/>
+        </p:spPr>
+        <p:txBody>
+          <a:bodyPr wrap="square" lIns="0" tIns="0" rIns="0" bIns="0" rtlCol="0" anchor="ctr"/>
+          <a:lstStyle/>
+          <a:p>
+            <a:pPr indent="0" marL="0">
+              <a:buNone/>
+            </a:pPr>
+            <a:r>
+              <a:rPr lang="en-US" sz="1300" dirty="0">
+                <a:solidFill>
+                  <a:srgbClr val="5F6F6C"/>
+                </a:solidFill>
+                <a:latin typeface="Arial" pitchFamily="34" charset="0"/>
+                <a:ea typeface="Arial" pitchFamily="34" charset="-122"/>
+                <a:cs typeface="Arial" pitchFamily="34" charset="-120"/>
+              </a:rPr>
+              <a:t>Cada resposta tem um campo de comentário opcional — sua observação clínica é valiosa.</a:t>
+            </a:r>
+            <a:endParaRPr lang="en-US" sz="1300" dirty="0"/>
           </a:p>
         </p:txBody>
       </p:sp>
@@ -4070,9 +6351,9 @@
 </p:sld>
 </file>
 
-<file path=ppt/slides/slide6.xml><?xml version="1.0" encoding="utf-8"?>
+<file path=ppt/slides/slide8.xml><?xml version="1.0" encoding="utf-8"?>
 <p:sld xmlns:a="http://schemas.openxmlformats.org/drawingml/2006/main" xmlns:r="http://schemas.openxmlformats.org/officeDocument/2006/relationships" xmlns:p="http://schemas.openxmlformats.org/presentationml/2006/main">
-  <p:cSld name="Slide 6">
+  <p:cSld name="Slide 8">
     <p:bg>
       <p:bgPr>
         <a:solidFill>
@@ -4166,7 +6447,7 @@
                 <a:ea typeface="Arial" pitchFamily="34" charset="-122"/>
                 <a:cs typeface="Arial" pitchFamily="34" charset="-120"/>
               </a:rPr>
-              <a:t>6</a:t>
+              <a:t>8</a:t>
             </a:r>
             <a:endParaRPr lang="en-US" sz="1000" dirty="0"/>
           </a:p>
@@ -4205,7 +6486,7 @@
                 <a:ea typeface="Georgia" pitchFamily="34" charset="-122"/>
                 <a:cs typeface="Georgia" pitchFamily="34" charset="-120"/>
               </a:rPr>
-              <a:t>Resultados Preliminares (avaliação automática)</a:t>
+              <a:t>Resultados Preliminares</a:t>
             </a:r>
             <a:endParaRPr lang="en-US" sz="3000" dirty="0"/>
           </a:p>
@@ -4244,7 +6525,7 @@
                 <a:ea typeface="Arial" pitchFamily="34" charset="-122"/>
                 <a:cs typeface="Arial" pitchFamily="34" charset="-120"/>
               </a:rPr>
-              <a:t>Indicadores — a sua revisão é o que transforma em prova</a:t>
+              <a:t>Avaliação automática — sua revisão é o que transforma em prova</a:t>
             </a:r>
             <a:endParaRPr lang="en-US" sz="1500" dirty="0"/>
           </a:p>
@@ -4252,7 +6533,7 @@
       </p:sp>
       <p:graphicFrame>
         <p:nvGraphicFramePr>
-          <p:cNvPr id="7" name="Table 0"/>
+          <p:cNvPr id="9" name="Table 0"/>
           <p:cNvGraphicFramePr>
             <a:graphicFrameLocks noGrp="1"/>
           </p:cNvGraphicFramePr>
@@ -4277,7 +6558,7 @@
                 <a:gridCol w="1828800"/>
                 <a:gridCol w="2286000"/>
               </a:tblGrid>
-              <a:tr h="502920">
+              <a:tr h="457200">
                 <a:tc>
                   <a:txBody>
                     <a:bodyPr/>
@@ -4483,7 +6764,7 @@
                   </a:tcPr>
                 </a:tc>
               </a:tr>
-              <a:tr h="502920">
+              <a:tr h="457200">
                 <a:tc>
                   <a:txBody>
                     <a:bodyPr/>
@@ -4947,24 +7228,50 @@
         </p:nvSpPr>
         <p:spPr>
           <a:xfrm>
-            <a:off x="7772400" y="1371600"/>
-            <a:ext cx="3840480" cy="2743200"/>
-          </a:xfrm>
-          <a:prstGeom prst="rect">
-            <a:avLst/>
-          </a:prstGeom>
-          <a:noFill/>
-          <a:ln/>
-        </p:spPr>
-        <p:txBody>
-          <a:bodyPr wrap="square" lIns="0" tIns="0" rIns="0" bIns="0" rtlCol="0" anchor="ctr"/>
-          <a:lstStyle/>
-          <a:p>
-            <a:pPr indent="0" marL="0">
-              <a:buNone/>
-            </a:pPr>
-            <a:r>
-              <a:rPr lang="en-US" sz="1500" dirty="0">
+            <a:off x="7498080" y="1371600"/>
+            <a:ext cx="4114800" cy="4114800"/>
+          </a:xfrm>
+          <a:prstGeom prst="rect">
+            <a:avLst/>
+          </a:prstGeom>
+          <a:noFill/>
+          <a:ln/>
+        </p:spPr>
+        <p:txBody>
+          <a:bodyPr wrap="square" lIns="0" tIns="0" rIns="0" bIns="0" rtlCol="0" anchor="ctr"/>
+          <a:lstStyle/>
+          <a:p>
+            <a:pPr indent="0" marL="0">
+              <a:buNone/>
+            </a:pPr>
+            <a:r>
+              <a:rPr lang="en-US" sz="1500" b="1" dirty="0">
+                <a:solidFill>
+                  <a:srgbClr val="155E56"/>
+                </a:solidFill>
+                <a:latin typeface="Arial" pitchFamily="34" charset="0"/>
+                <a:ea typeface="Arial" pitchFamily="34" charset="-122"/>
+                <a:cs typeface="Arial" pitchFamily="34" charset="-120"/>
+              </a:rPr>
+              <a:t>Como ler: </a:t>
+            </a:r>
+            <a:pPr indent="0" marL="0">
+              <a:buNone/>
+            </a:pPr>
+            <a:endParaRPr lang="en-US" sz="1500" dirty="0"/>
+          </a:p>
+          <a:p>
+            <a:pPr indent="0" marL="0">
+              <a:buNone/>
+            </a:pPr>
+            <a:endParaRPr lang="en-US" sz="1500" dirty="0"/>
+          </a:p>
+          <a:p>
+            <a:pPr indent="0" marL="0">
+              <a:buNone/>
+            </a:pPr>
+            <a:r>
+              <a:rPr lang="en-US" sz="1300" dirty="0">
                 <a:solidFill>
                   <a:srgbClr val="18211F"/>
                 </a:solidFill>
@@ -4972,27 +7279,22 @@
                 <a:ea typeface="Arial" pitchFamily="34" charset="-122"/>
                 <a:cs typeface="Arial" pitchFamily="34" charset="-120"/>
               </a:rPr>
-              <a:t>A avaliação automática mede </a:t>
-            </a:r>
-            <a:pPr indent="0" marL="0">
-              <a:buNone/>
-            </a:pPr>
-            <a:r>
-              <a:rPr lang="en-US" sz="1500" b="1" dirty="0">
-                <a:solidFill>
-                  <a:srgbClr val="155E56"/>
-                </a:solidFill>
-                <a:latin typeface="Arial" pitchFamily="34" charset="0"/>
-                <a:ea typeface="Arial" pitchFamily="34" charset="-122"/>
-                <a:cs typeface="Arial" pitchFamily="34" charset="-120"/>
-              </a:rPr>
-              <a:t>correspondência literal de texto</a:t>
-            </a:r>
-            <a:pPr indent="0" marL="0">
-              <a:buNone/>
-            </a:pPr>
-            <a:r>
-              <a:rPr lang="en-US" sz="1500" dirty="0">
+              <a:t>Coverage = fração das afirmações críticas do gabarito presentes na resposta. A avaliação automática faz correspondência literal de texto — 'ventilação não invasiva' em vez de 'VNI' perde o ponto. Sua revisão corrige isso.</a:t>
+            </a:r>
+            <a:endParaRPr lang="en-US" sz="1500" dirty="0"/>
+          </a:p>
+          <a:p>
+            <a:pPr indent="0" marL="0">
+              <a:buNone/>
+            </a:pPr>
+            <a:endParaRPr lang="en-US" sz="1500" dirty="0"/>
+          </a:p>
+          <a:p>
+            <a:pPr indent="0" marL="0">
+              <a:buNone/>
+            </a:pPr>
+            <a:r>
+              <a:rPr lang="en-US" sz="1300" dirty="0">
                 <a:solidFill>
                   <a:srgbClr val="18211F"/>
                 </a:solidFill>
@@ -5000,7 +7302,7 @@
                 <a:ea typeface="Arial" pitchFamily="34" charset="-122"/>
                 <a:cs typeface="Arial" pitchFamily="34" charset="-120"/>
               </a:rPr>
-              <a:t>. Um modelo que diz 'ventilação não invasiva' em vez de 'VNI' perde o ponto. A revisão humana corrige isso.</a:t>
+              <a:t>Abstenções = vezes que o modelo disse 'não posso afirmar' quando devia. Mais é melhor.</a:t>
             </a:r>
             <a:endParaRPr lang="en-US" sz="1500" dirty="0"/>
           </a:p>
@@ -5014,9 +7316,9 @@
 </p:sld>
 </file>
 
-<file path=ppt/slides/slide7.xml><?xml version="1.0" encoding="utf-8"?>
+<file path=ppt/slides/slide9.xml><?xml version="1.0" encoding="utf-8"?>
 <p:sld xmlns:a="http://schemas.openxmlformats.org/drawingml/2006/main" xmlns:r="http://schemas.openxmlformats.org/officeDocument/2006/relationships" xmlns:p="http://schemas.openxmlformats.org/presentationml/2006/main">
-  <p:cSld name="Slide 7">
+  <p:cSld name="Slide 9">
     <p:bg>
       <p:bgPr>
         <a:solidFill>
@@ -5110,7 +7412,7 @@
                 <a:ea typeface="Arial" pitchFamily="34" charset="-122"/>
                 <a:cs typeface="Arial" pitchFamily="34" charset="-120"/>
               </a:rPr>
-              <a:t>7</a:t>
+              <a:t>9</a:t>
             </a:r>
             <a:endParaRPr lang="en-US" sz="1000" dirty="0"/>
           </a:p>
@@ -5202,7 +7504,7 @@
         </p:nvSpPr>
         <p:spPr>
           <a:xfrm>
-            <a:off x="548640" y="1645920"/>
+            <a:off x="548640" y="1371600"/>
             <a:ext cx="1097280" cy="640080"/>
           </a:xfrm>
           <a:prstGeom prst="rect">
@@ -5227,7 +7529,7 @@
         </p:nvSpPr>
         <p:spPr>
           <a:xfrm>
-            <a:off x="548640" y="1645920"/>
+            <a:off x="548640" y="1371600"/>
             <a:ext cx="1097280" cy="640080"/>
           </a:xfrm>
           <a:prstGeom prst="rect">
@@ -5266,7 +7568,7 @@
         </p:nvSpPr>
         <p:spPr>
           <a:xfrm>
-            <a:off x="1920240" y="1691640"/>
+            <a:off x="1920240" y="1417320"/>
             <a:ext cx="1371600" cy="548640"/>
           </a:xfrm>
           <a:prstGeom prst="rect">
@@ -5305,7 +7607,7 @@
         </p:nvSpPr>
         <p:spPr>
           <a:xfrm>
-            <a:off x="3474720" y="1691640"/>
+            <a:off x="3474720" y="1417320"/>
             <a:ext cx="7315200" cy="548640"/>
           </a:xfrm>
           <a:prstGeom prst="rect">
@@ -5344,7 +7646,7 @@
         </p:nvSpPr>
         <p:spPr>
           <a:xfrm>
-            <a:off x="548640" y="2560320"/>
+            <a:off x="548640" y="2286000"/>
             <a:ext cx="1097280" cy="640080"/>
           </a:xfrm>
           <a:prstGeom prst="rect">
@@ -5369,7 +7671,7 @@
         </p:nvSpPr>
         <p:spPr>
           <a:xfrm>
-            <a:off x="548640" y="2560320"/>
+            <a:off x="548640" y="2286000"/>
             <a:ext cx="1097280" cy="640080"/>
           </a:xfrm>
           <a:prstGeom prst="rect">
@@ -5408,7 +7710,7 @@
         </p:nvSpPr>
         <p:spPr>
           <a:xfrm>
-            <a:off x="1920240" y="2606040"/>
+            <a:off x="1920240" y="2331720"/>
             <a:ext cx="1371600" cy="548640"/>
           </a:xfrm>
           <a:prstGeom prst="rect">
@@ -5447,7 +7749,7 @@
         </p:nvSpPr>
         <p:spPr>
           <a:xfrm>
-            <a:off x="3474720" y="2606040"/>
+            <a:off x="3474720" y="2331720"/>
             <a:ext cx="7315200" cy="548640"/>
           </a:xfrm>
           <a:prstGeom prst="rect">
@@ -5486,7 +7788,7 @@
         </p:nvSpPr>
         <p:spPr>
           <a:xfrm>
-            <a:off x="548640" y="3474720"/>
+            <a:off x="548640" y="3200400"/>
             <a:ext cx="1097280" cy="640080"/>
           </a:xfrm>
           <a:prstGeom prst="rect">
@@ -5511,7 +7813,7 @@
         </p:nvSpPr>
         <p:spPr>
           <a:xfrm>
-            <a:off x="548640" y="3474720"/>
+            <a:off x="548640" y="3200400"/>
             <a:ext cx="1097280" cy="640080"/>
           </a:xfrm>
           <a:prstGeom prst="rect">
@@ -5550,7 +7852,7 @@
         </p:nvSpPr>
         <p:spPr>
           <a:xfrm>
-            <a:off x="1920240" y="3520440"/>
+            <a:off x="1920240" y="3246120"/>
             <a:ext cx="1371600" cy="548640"/>
           </a:xfrm>
           <a:prstGeom prst="rect">
@@ -5589,7 +7891,7 @@
         </p:nvSpPr>
         <p:spPr>
           <a:xfrm>
-            <a:off x="3474720" y="3520440"/>
+            <a:off x="3474720" y="3246120"/>
             <a:ext cx="7315200" cy="548640"/>
           </a:xfrm>
           <a:prstGeom prst="rect">
@@ -5628,8 +7930,8 @@
         </p:nvSpPr>
         <p:spPr>
           <a:xfrm>
-            <a:off x="548640" y="4754880"/>
-            <a:ext cx="11091672" cy="914400"/>
+            <a:off x="548640" y="4389120"/>
+            <a:ext cx="11091672" cy="1097280"/>
           </a:xfrm>
           <a:prstGeom prst="rect">
             <a:avLst/>
@@ -5698,524 +8000,6 @@
               <a:t>nenhum dado de paciente, nada além de perguntas anonimizadas e tempo de revisão.</a:t>
             </a:r>
             <a:endParaRPr lang="en-US" sz="1400" dirty="0"/>
-          </a:p>
-        </p:txBody>
-      </p:sp>
-    </p:spTree>
-  </p:cSld>
-  <p:clrMapOvr>
-    <a:masterClrMapping/>
-  </p:clrMapOvr>
-</p:sld>
-</file>
-
-<file path=ppt/slides/slide8.xml><?xml version="1.0" encoding="utf-8"?>
-<p:sld xmlns:a="http://schemas.openxmlformats.org/drawingml/2006/main" xmlns:r="http://schemas.openxmlformats.org/officeDocument/2006/relationships" xmlns:p="http://schemas.openxmlformats.org/presentationml/2006/main">
-  <p:cSld name="Slide 8">
-    <p:bg>
-      <p:bgPr>
-        <a:solidFill>
-          <a:srgbClr val="FFFFFF"/>
-        </a:solidFill>
-      </p:bgPr>
-    </p:bg>
-    <p:spTree>
-      <p:nvGrpSpPr>
-        <p:cNvPr id="1" name=""/>
-        <p:cNvGrpSpPr/>
-        <p:nvPr/>
-      </p:nvGrpSpPr>
-      <p:grpSpPr>
-        <a:xfrm>
-          <a:off x="0" y="0"/>
-          <a:ext cx="0" cy="0"/>
-          <a:chOff x="0" y="0"/>
-          <a:chExt cx="0" cy="0"/>
-        </a:xfrm>
-      </p:grpSpPr>
-      <p:sp>
-        <p:nvSpPr>
-          <p:cNvPr id="2" name="Text 0"/>
-          <p:cNvSpPr/>
-          <p:nvPr/>
-        </p:nvSpPr>
-        <p:spPr>
-          <a:xfrm>
-            <a:off x="548640" y="6446520"/>
-            <a:ext cx="5486400" cy="274320"/>
-          </a:xfrm>
-          <a:prstGeom prst="rect">
-            <a:avLst/>
-          </a:prstGeom>
-          <a:noFill/>
-          <a:ln/>
-        </p:spPr>
-        <p:txBody>
-          <a:bodyPr wrap="square" lIns="0" tIns="0" rIns="0" bIns="0" rtlCol="0" anchor="ctr"/>
-          <a:lstStyle/>
-          <a:p>
-            <a:pPr indent="0" marL="0">
-              <a:buNone/>
-            </a:pPr>
-            <a:r>
-              <a:rPr lang="en-US" sz="1000" dirty="0">
-                <a:solidFill>
-                  <a:srgbClr val="5F6F6C"/>
-                </a:solidFill>
-                <a:latin typeface="Arial" pitchFamily="34" charset="0"/>
-                <a:ea typeface="Arial" pitchFamily="34" charset="-122"/>
-                <a:cs typeface="Arial" pitchFamily="34" charset="-120"/>
-              </a:rPr>
-              <a:t>BeansTech · Benchmark Cego · Confidencial</a:t>
-            </a:r>
-            <a:endParaRPr lang="en-US" sz="1000" dirty="0"/>
-          </a:p>
-        </p:txBody>
-      </p:sp>
-      <p:sp>
-        <p:nvSpPr>
-          <p:cNvPr id="3" name="Text 1"/>
-          <p:cNvSpPr/>
-          <p:nvPr/>
-        </p:nvSpPr>
-        <p:spPr>
-          <a:xfrm>
-            <a:off x="11091672" y="6446520"/>
-            <a:ext cx="548640" cy="274320"/>
-          </a:xfrm>
-          <a:prstGeom prst="rect">
-            <a:avLst/>
-          </a:prstGeom>
-          <a:noFill/>
-          <a:ln/>
-        </p:spPr>
-        <p:txBody>
-          <a:bodyPr wrap="square" lIns="0" tIns="0" rIns="0" bIns="0" rtlCol="0" anchor="ctr"/>
-          <a:lstStyle/>
-          <a:p>
-            <a:pPr algn="r" indent="0" marL="0">
-              <a:buNone/>
-            </a:pPr>
-            <a:r>
-              <a:rPr lang="en-US" sz="1000" dirty="0">
-                <a:solidFill>
-                  <a:srgbClr val="5F6F6C"/>
-                </a:solidFill>
-                <a:latin typeface="Arial" pitchFamily="34" charset="0"/>
-                <a:ea typeface="Arial" pitchFamily="34" charset="-122"/>
-                <a:cs typeface="Arial" pitchFamily="34" charset="-120"/>
-              </a:rPr>
-              <a:t>8</a:t>
-            </a:r>
-            <a:endParaRPr lang="en-US" sz="1000" dirty="0"/>
-          </a:p>
-        </p:txBody>
-      </p:sp>
-      <p:sp>
-        <p:nvSpPr>
-          <p:cNvPr id="4" name="Text 2"/>
-          <p:cNvSpPr/>
-          <p:nvPr/>
-        </p:nvSpPr>
-        <p:spPr>
-          <a:xfrm>
-            <a:off x="548640" y="365760"/>
-            <a:ext cx="11091672" cy="731520"/>
-          </a:xfrm>
-          <a:prstGeom prst="rect">
-            <a:avLst/>
-          </a:prstGeom>
-          <a:noFill/>
-          <a:ln/>
-        </p:spPr>
-        <p:txBody>
-          <a:bodyPr wrap="square" lIns="0" tIns="0" rIns="0" bIns="0" rtlCol="0" anchor="ctr"/>
-          <a:lstStyle/>
-          <a:p>
-            <a:pPr indent="0" marL="0">
-              <a:buNone/>
-            </a:pPr>
-            <a:r>
-              <a:rPr lang="en-US" sz="3000" b="1" dirty="0">
-                <a:solidFill>
-                  <a:srgbClr val="155E56"/>
-                </a:solidFill>
-                <a:latin typeface="Georgia" pitchFamily="34" charset="0"/>
-                <a:ea typeface="Georgia" pitchFamily="34" charset="-122"/>
-                <a:cs typeface="Georgia" pitchFamily="34" charset="-120"/>
-              </a:rPr>
-              <a:t>Como Participar</a:t>
-            </a:r>
-            <a:endParaRPr lang="en-US" sz="3000" dirty="0"/>
-          </a:p>
-        </p:txBody>
-      </p:sp>
-      <p:sp>
-        <p:nvSpPr>
-          <p:cNvPr id="5" name="Text 3"/>
-          <p:cNvSpPr/>
-          <p:nvPr/>
-        </p:nvSpPr>
-        <p:spPr>
-          <a:xfrm>
-            <a:off x="548640" y="1645920"/>
-            <a:ext cx="11091672" cy="457200"/>
-          </a:xfrm>
-          <a:prstGeom prst="rect">
-            <a:avLst/>
-          </a:prstGeom>
-          <a:noFill/>
-          <a:ln/>
-        </p:spPr>
-        <p:txBody>
-          <a:bodyPr wrap="square" lIns="0" tIns="0" rIns="0" bIns="0" rtlCol="0" anchor="ctr"/>
-          <a:lstStyle/>
-          <a:p>
-            <a:pPr indent="0" marL="0">
-              <a:buNone/>
-            </a:pPr>
-            <a:r>
-              <a:rPr lang="en-US" sz="1600" b="1" dirty="0">
-                <a:solidFill>
-                  <a:srgbClr val="155E56"/>
-                </a:solidFill>
-                <a:latin typeface="Arial" pitchFamily="34" charset="0"/>
-                <a:ea typeface="Arial" pitchFamily="34" charset="-122"/>
-                <a:cs typeface="Arial" pitchFamily="34" charset="-120"/>
-              </a:rPr>
-              <a:t>Repositório: </a:t>
-            </a:r>
-            <a:pPr indent="0" marL="0">
-              <a:buNone/>
-            </a:pPr>
-            <a:r>
-              <a:rPr lang="en-US" sz="1600" dirty="0">
-                <a:solidFill>
-                  <a:srgbClr val="18211F"/>
-                </a:solidFill>
-                <a:latin typeface="Arial" pitchFamily="34" charset="0"/>
-                <a:ea typeface="Arial" pitchFamily="34" charset="-122"/>
-                <a:cs typeface="Arial" pitchFamily="34" charset="-120"/>
-              </a:rPr>
-              <a:t>github.com/beanstechhub/einstein-benchmark (privado — convite por email)</a:t>
-            </a:r>
-            <a:endParaRPr lang="en-US" sz="1600" dirty="0"/>
-          </a:p>
-        </p:txBody>
-      </p:sp>
-      <p:sp>
-        <p:nvSpPr>
-          <p:cNvPr id="6" name="Text 4"/>
-          <p:cNvSpPr/>
-          <p:nvPr/>
-        </p:nvSpPr>
-        <p:spPr>
-          <a:xfrm>
-            <a:off x="548640" y="2286000"/>
-            <a:ext cx="11091672" cy="457200"/>
-          </a:xfrm>
-          <a:prstGeom prst="rect">
-            <a:avLst/>
-          </a:prstGeom>
-          <a:noFill/>
-          <a:ln/>
-        </p:spPr>
-        <p:txBody>
-          <a:bodyPr wrap="square" lIns="0" tIns="0" rIns="0" bIns="0" rtlCol="0" anchor="ctr"/>
-          <a:lstStyle/>
-          <a:p>
-            <a:pPr indent="0" marL="0">
-              <a:buNone/>
-            </a:pPr>
-            <a:r>
-              <a:rPr lang="en-US" sz="1600" b="1" dirty="0">
-                <a:solidFill>
-                  <a:srgbClr val="155E56"/>
-                </a:solidFill>
-                <a:latin typeface="Arial" pitchFamily="34" charset="0"/>
-                <a:ea typeface="Arial" pitchFamily="34" charset="-122"/>
-                <a:cs typeface="Arial" pitchFamily="34" charset="-120"/>
-              </a:rPr>
-              <a:t>Conteúdo: </a:t>
-            </a:r>
-            <a:pPr indent="0" marL="0">
-              <a:buNone/>
-            </a:pPr>
-            <a:r>
-              <a:rPr lang="en-US" sz="1600" dirty="0">
-                <a:solidFill>
-                  <a:srgbClr val="18211F"/>
-                </a:solidFill>
-                <a:latin typeface="Arial" pitchFamily="34" charset="0"/>
-                <a:ea typeface="Arial" pitchFamily="34" charset="-122"/>
-                <a:cs typeface="Arial" pitchFamily="34" charset="-120"/>
-              </a:rPr>
-              <a:t>blind_package.json (200 casos + respostas cegas) · review_form.tsv (formulário)</a:t>
-            </a:r>
-            <a:endParaRPr lang="en-US" sz="1600" dirty="0"/>
-          </a:p>
-        </p:txBody>
-      </p:sp>
-      <p:sp>
-        <p:nvSpPr>
-          <p:cNvPr id="7" name="Text 5"/>
-          <p:cNvSpPr/>
-          <p:nvPr/>
-        </p:nvSpPr>
-        <p:spPr>
-          <a:xfrm>
-            <a:off x="548640" y="2926080"/>
-            <a:ext cx="11091672" cy="457200"/>
-          </a:xfrm>
-          <a:prstGeom prst="rect">
-            <a:avLst/>
-          </a:prstGeom>
-          <a:noFill/>
-          <a:ln/>
-        </p:spPr>
-        <p:txBody>
-          <a:bodyPr wrap="square" lIns="0" tIns="0" rIns="0" bIns="0" rtlCol="0" anchor="ctr"/>
-          <a:lstStyle/>
-          <a:p>
-            <a:pPr indent="0" marL="0">
-              <a:buNone/>
-            </a:pPr>
-            <a:r>
-              <a:rPr lang="en-US" sz="1600" b="1" dirty="0">
-                <a:solidFill>
-                  <a:srgbClr val="155E56"/>
-                </a:solidFill>
-                <a:latin typeface="Arial" pitchFamily="34" charset="0"/>
-                <a:ea typeface="Arial" pitchFamily="34" charset="-122"/>
-                <a:cs typeface="Arial" pitchFamily="34" charset="-120"/>
-              </a:rPr>
-              <a:t>Prazo sugerido: </a:t>
-            </a:r>
-            <a:pPr indent="0" marL="0">
-              <a:buNone/>
-            </a:pPr>
-            <a:r>
-              <a:rPr lang="en-US" sz="1600" dirty="0">
-                <a:solidFill>
-                  <a:srgbClr val="18211F"/>
-                </a:solidFill>
-                <a:latin typeface="Arial" pitchFamily="34" charset="0"/>
-                <a:ea typeface="Arial" pitchFamily="34" charset="-122"/>
-                <a:cs typeface="Arial" pitchFamily="34" charset="-120"/>
-              </a:rPr>
-              <a:t>2 semanas para revisão dos 200 casos (~3 min/caso = 10 horas)</a:t>
-            </a:r>
-            <a:endParaRPr lang="en-US" sz="1600" dirty="0"/>
-          </a:p>
-        </p:txBody>
-      </p:sp>
-      <p:sp>
-        <p:nvSpPr>
-          <p:cNvPr id="8" name="Shape 6"/>
-          <p:cNvSpPr/>
-          <p:nvPr/>
-        </p:nvSpPr>
-        <p:spPr>
-          <a:xfrm>
-            <a:off x="548640" y="3657600"/>
-            <a:ext cx="11091672" cy="0"/>
-          </a:xfrm>
-          <a:prstGeom prst="line">
-            <a:avLst/>
-          </a:prstGeom>
-          <a:noFill/>
-          <a:ln w="9525">
-            <a:solidFill>
-              <a:srgbClr val="CFDCD9"/>
-            </a:solidFill>
-            <a:prstDash val="solid"/>
-          </a:ln>
-        </p:spPr>
-      </p:sp>
-      <p:sp>
-        <p:nvSpPr>
-          <p:cNvPr id="9" name="Text 7"/>
-          <p:cNvSpPr/>
-          <p:nvPr/>
-        </p:nvSpPr>
-        <p:spPr>
-          <a:xfrm>
-            <a:off x="548640" y="3840480"/>
-            <a:ext cx="11091672" cy="548640"/>
-          </a:xfrm>
-          <a:prstGeom prst="rect">
-            <a:avLst/>
-          </a:prstGeom>
-          <a:noFill/>
-          <a:ln/>
-        </p:spPr>
-        <p:txBody>
-          <a:bodyPr wrap="square" lIns="0" tIns="0" rIns="0" bIns="0" rtlCol="0" anchor="ctr"/>
-          <a:lstStyle/>
-          <a:p>
-            <a:pPr indent="0" marL="0">
-              <a:buNone/>
-            </a:pPr>
-            <a:r>
-              <a:rPr lang="en-US" sz="1800" b="1" dirty="0">
-                <a:solidFill>
-                  <a:srgbClr val="DC2626"/>
-                </a:solidFill>
-                <a:latin typeface="Arial" pitchFamily="34" charset="0"/>
-                <a:ea typeface="Arial" pitchFamily="34" charset="-122"/>
-                <a:cs typeface="Arial" pitchFamily="34" charset="-120"/>
-              </a:rPr>
-              <a:t>Não abra </a:t>
-            </a:r>
-            <a:pPr indent="0" marL="0">
-              <a:buNone/>
-            </a:pPr>
-            <a:r>
-              <a:rPr lang="en-US" sz="1800" b="1" i="1" dirty="0">
-                <a:solidFill>
-                  <a:srgbClr val="155E56"/>
-                </a:solidFill>
-                <a:latin typeface="Arial" pitchFamily="34" charset="0"/>
-                <a:ea typeface="Arial" pitchFamily="34" charset="-122"/>
-                <a:cs typeface="Arial" pitchFamily="34" charset="-120"/>
-              </a:rPr>
-              <a:t>gabarito.json</a:t>
-            </a:r>
-            <a:pPr indent="0" marL="0">
-              <a:buNone/>
-            </a:pPr>
-            <a:r>
-              <a:rPr lang="en-US" sz="1800" b="1" dirty="0">
-                <a:solidFill>
-                  <a:srgbClr val="DC2626"/>
-                </a:solidFill>
-                <a:latin typeface="Arial" pitchFamily="34" charset="0"/>
-                <a:ea typeface="Arial" pitchFamily="34" charset="-122"/>
-                <a:cs typeface="Arial" pitchFamily="34" charset="-120"/>
-              </a:rPr>
-              <a:t> ou </a:t>
-            </a:r>
-            <a:pPr indent="0" marL="0">
-              <a:buNone/>
-            </a:pPr>
-            <a:r>
-              <a:rPr lang="en-US" sz="1800" b="1" i="1" dirty="0">
-                <a:solidFill>
-                  <a:srgbClr val="155E56"/>
-                </a:solidFill>
-                <a:latin typeface="Arial" pitchFamily="34" charset="0"/>
-                <a:ea typeface="Arial" pitchFamily="34" charset="-122"/>
-                <a:cs typeface="Arial" pitchFamily="34" charset="-120"/>
-              </a:rPr>
-              <a:t>blind_key.json</a:t>
-            </a:r>
-            <a:pPr indent="0" marL="0">
-              <a:buNone/>
-            </a:pPr>
-            <a:r>
-              <a:rPr lang="en-US" sz="1800" b="1" dirty="0">
-                <a:solidFill>
-                  <a:srgbClr val="DC2626"/>
-                </a:solidFill>
-                <a:latin typeface="Arial" pitchFamily="34" charset="0"/>
-                <a:ea typeface="Arial" pitchFamily="34" charset="-122"/>
-                <a:cs typeface="Arial" pitchFamily="34" charset="-120"/>
-              </a:rPr>
-              <a:t> antes de terminar a revisão.</a:t>
-            </a:r>
-            <a:endParaRPr lang="en-US" sz="1800" dirty="0"/>
-          </a:p>
-        </p:txBody>
-      </p:sp>
-      <p:sp>
-        <p:nvSpPr>
-          <p:cNvPr id="10" name="Text 8"/>
-          <p:cNvSpPr/>
-          <p:nvPr/>
-        </p:nvSpPr>
-        <p:spPr>
-          <a:xfrm>
-            <a:off x="548640" y="5029200"/>
-            <a:ext cx="9144000" cy="457200"/>
-          </a:xfrm>
-          <a:prstGeom prst="rect">
-            <a:avLst/>
-          </a:prstGeom>
-          <a:noFill/>
-          <a:ln/>
-        </p:spPr>
-        <p:txBody>
-          <a:bodyPr wrap="square" lIns="0" tIns="0" rIns="0" bIns="0" rtlCol="0" anchor="ctr"/>
-          <a:lstStyle/>
-          <a:p>
-            <a:pPr indent="0" marL="0">
-              <a:buNone/>
-            </a:pPr>
-            <a:r>
-              <a:rPr lang="en-US" sz="1400" b="1" dirty="0">
-                <a:solidFill>
-                  <a:srgbClr val="1A3C34"/>
-                </a:solidFill>
-                <a:latin typeface="Arial" pitchFamily="34" charset="0"/>
-                <a:ea typeface="Arial" pitchFamily="34" charset="-122"/>
-                <a:cs typeface="Arial" pitchFamily="34" charset="-120"/>
-              </a:rPr>
-              <a:t>Matheus Feijão · WhatsApp +55 11 92507-9058 · matheus@beanstech.com.br</a:t>
-            </a:r>
-            <a:endParaRPr lang="en-US" sz="1400" dirty="0"/>
-          </a:p>
-        </p:txBody>
-      </p:sp>
-      <p:sp>
-        <p:nvSpPr>
-          <p:cNvPr id="11" name="Text 9"/>
-          <p:cNvSpPr/>
-          <p:nvPr/>
-        </p:nvSpPr>
-        <p:spPr>
-          <a:xfrm>
-            <a:off x="548640" y="5760720"/>
-            <a:ext cx="9144000" cy="457200"/>
-          </a:xfrm>
-          <a:prstGeom prst="rect">
-            <a:avLst/>
-          </a:prstGeom>
-          <a:noFill/>
-          <a:ln/>
-        </p:spPr>
-        <p:txBody>
-          <a:bodyPr wrap="square" lIns="0" tIns="0" rIns="0" bIns="0" rtlCol="0" anchor="ctr"/>
-          <a:lstStyle/>
-          <a:p>
-            <a:pPr indent="0" marL="0">
-              <a:buNone/>
-            </a:pPr>
-            <a:r>
-              <a:rPr lang="en-US" sz="1800" i="1" dirty="0">
-                <a:solidFill>
-                  <a:srgbClr val="155E56"/>
-                </a:solidFill>
-                <a:latin typeface="Georgia" pitchFamily="34" charset="0"/>
-                <a:ea typeface="Georgia" pitchFamily="34" charset="-122"/>
-                <a:cs typeface="Georgia" pitchFamily="34" charset="-120"/>
-              </a:rPr>
-              <a:t>A IA é sempre um meio. </a:t>
-            </a:r>
-            <a:pPr indent="0" marL="0">
-              <a:buNone/>
-            </a:pPr>
-            <a:r>
-              <a:rPr lang="en-US" sz="1800" b="1" i="1" dirty="0">
-                <a:solidFill>
-                  <a:srgbClr val="D97B1E"/>
-                </a:solidFill>
-                <a:latin typeface="Georgia" pitchFamily="34" charset="0"/>
-                <a:ea typeface="Georgia" pitchFamily="34" charset="-122"/>
-                <a:cs typeface="Georgia" pitchFamily="34" charset="-120"/>
-              </a:rPr>
-              <a:t>O médico decide. Sempre.</a:t>
-            </a:r>
-            <a:endParaRPr lang="en-US" sz="1800" dirty="0"/>
           </a:p>
         </p:txBody>
       </p:sp>

--- a/apresentacoes/Benchmark_Cego_Medicos.pptx
+++ b/apresentacoes/Benchmark_Cego_Medicos.pptx
@@ -2212,7 +2212,7 @@
                 <a:ea typeface="Arial" pitchFamily="34" charset="-122"/>
                 <a:cs typeface="Arial" pitchFamily="34" charset="-120"/>
               </a:rPr>
-              <a:t>2 a 4 semanas ({~}6 horas, divisível em sessões de 30-60 min)</a:t>
+              <a:t>2 a 4 semanas (~6 horas, divisível em sessões de 30-60 min)</a:t>
             </a:r>
             <a:endParaRPr lang="en-US" sz="1500" dirty="0"/>
           </a:p>
